--- a/docs/capstone/presentations/DesignPres.pptx
+++ b/docs/capstone/presentations/DesignPres.pptx
@@ -4,9 +4,6 @@
   <p:sldMasterIdLst>
     <p:sldMasterId id="2147483659" r:id="rId5"/>
   </p:sldMasterIdLst>
-  <p:notesMasterIdLst>
-    <p:notesMasterId r:id="rId6"/>
-  </p:notesMasterIdLst>
   <p:sldIdLst>
     <p:sldId id="256" r:id="rId7"/>
     <p:sldId id="257" r:id="rId8"/>
@@ -38,7 +35,6 @@
     <p:sldId id="283" r:id="rId34"/>
     <p:sldId id="284" r:id="rId35"/>
     <p:sldId id="285" r:id="rId36"/>
-    <p:sldId id="286" r:id="rId37"/>
     <p:sldId id="287" r:id="rId38"/>
     <p:sldId id="288" r:id="rId39"/>
   </p:sldIdLst>
@@ -297,3725 +293,6 @@
     </p:ext>
   </p:extLst>
 </p:presentation>
-</file>
-
-<file path=ppt/commentAuthors.xml><?xml version="1.0" encoding="utf-8"?>
-<p:cmAuthorLst xmlns:a="http://schemas.openxmlformats.org/drawingml/2006/main" xmlns:r="http://schemas.openxmlformats.org/officeDocument/2006/relationships" xmlns:mc="http://schemas.openxmlformats.org/markup-compatibility/2006" xmlns:mv="urn:schemas-microsoft-com:mac:vml" xmlns:p="http://schemas.openxmlformats.org/presentationml/2006/main" xmlns:c="http://schemas.openxmlformats.org/drawingml/2006/chart" xmlns:dgm="http://schemas.openxmlformats.org/drawingml/2006/diagram" xmlns:o="urn:schemas-microsoft-com:office:office" xmlns:v="urn:schemas-microsoft-com:vml" xmlns:pvml="urn:schemas-microsoft-com:office:powerpoint" xmlns:com="http://schemas.openxmlformats.org/drawingml/2006/compatibility" xmlns:p14="http://schemas.microsoft.com/office/powerpoint/2010/main" xmlns:p15="http://schemas.microsoft.com/office/powerpoint/2012/main" xmlns:ahyp="http://schemas.microsoft.com/office/drawing/2018/hyperlinkcolor">
-  <p:cmAuthor clrIdx="0" id="0" initials="" lastIdx="2" name="Derek Hodgkins"/>
-</p:cmAuthorLst>
-</file>
-
-<file path=ppt/comments/comment1.xml><?xml version="1.0" encoding="utf-8"?>
-<p:cmLst xmlns:a="http://schemas.openxmlformats.org/drawingml/2006/main" xmlns:r="http://schemas.openxmlformats.org/officeDocument/2006/relationships" xmlns:mc="http://schemas.openxmlformats.org/markup-compatibility/2006" xmlns:mv="urn:schemas-microsoft-com:mac:vml" xmlns:p="http://schemas.openxmlformats.org/presentationml/2006/main" xmlns:c="http://schemas.openxmlformats.org/drawingml/2006/chart" xmlns:dgm="http://schemas.openxmlformats.org/drawingml/2006/diagram" xmlns:o="urn:schemas-microsoft-com:office:office" xmlns:v="urn:schemas-microsoft-com:vml" xmlns:pvml="urn:schemas-microsoft-com:office:powerpoint" xmlns:com="http://schemas.openxmlformats.org/drawingml/2006/compatibility" xmlns:p14="http://schemas.microsoft.com/office/powerpoint/2010/main" xmlns:p15="http://schemas.microsoft.com/office/powerpoint/2012/main" xmlns:ahyp="http://schemas.microsoft.com/office/drawing/2018/hyperlinkcolor">
-  <p:cm authorId="0" idx="1" dt="2026-02-18T10:09:08.514">
-    <p:pos x="6000" y="0"/>
-    <p:text>should we mention that the main purpose of this project is to like display the difference between probability on confirmations vs time</p:text>
-  </p:cm>
-</p:cmLst>
-</file>
-
-<file path=ppt/comments/comment2.xml><?xml version="1.0" encoding="utf-8"?>
-<p:cmLst xmlns:a="http://schemas.openxmlformats.org/drawingml/2006/main" xmlns:r="http://schemas.openxmlformats.org/officeDocument/2006/relationships" xmlns:mc="http://schemas.openxmlformats.org/markup-compatibility/2006" xmlns:mv="urn:schemas-microsoft-com:mac:vml" xmlns:p="http://schemas.openxmlformats.org/presentationml/2006/main" xmlns:c="http://schemas.openxmlformats.org/drawingml/2006/chart" xmlns:dgm="http://schemas.openxmlformats.org/drawingml/2006/diagram" xmlns:o="urn:schemas-microsoft-com:office:office" xmlns:v="urn:schemas-microsoft-com:vml" xmlns:pvml="urn:schemas-microsoft-com:office:powerpoint" xmlns:com="http://schemas.openxmlformats.org/drawingml/2006/compatibility" xmlns:p14="http://schemas.microsoft.com/office/powerpoint/2010/main" xmlns:p15="http://schemas.microsoft.com/office/powerpoint/2012/main" xmlns:ahyp="http://schemas.microsoft.com/office/drawing/2018/hyperlinkcolor">
-  <p:cm authorId="0" idx="2" dt="2026-02-19T07:35:10.081">
-    <p:pos x="678" y="1432"/>
-    <p:text>brought in some higher quality versions
-1 total reaction
-Zong Xiong reacted with 😍 at 2026-02-19 07:35 AM</p:text>
-  </p:cm>
-</p:cmLst>
-</file>
-
-<file path=ppt/notesMasters/notesMaster1.xml><?xml version="1.0" encoding="utf-8"?>
-<p:notesMaster xmlns:a="http://schemas.openxmlformats.org/drawingml/2006/main" xmlns:r="http://schemas.openxmlformats.org/officeDocument/2006/relationships" xmlns:mc="http://schemas.openxmlformats.org/markup-compatibility/2006" xmlns:mv="urn:schemas-microsoft-com:mac:vml" xmlns:p="http://schemas.openxmlformats.org/presentationml/2006/main" xmlns:c="http://schemas.openxmlformats.org/drawingml/2006/chart" xmlns:dgm="http://schemas.openxmlformats.org/drawingml/2006/diagram" xmlns:o="urn:schemas-microsoft-com:office:office" xmlns:v="urn:schemas-microsoft-com:vml" xmlns:pvml="urn:schemas-microsoft-com:office:powerpoint" xmlns:com="http://schemas.openxmlformats.org/drawingml/2006/compatibility" xmlns:p14="http://schemas.microsoft.com/office/powerpoint/2010/main" xmlns:p15="http://schemas.microsoft.com/office/powerpoint/2012/main" xmlns:ahyp="http://schemas.microsoft.com/office/drawing/2018/hyperlinkcolor">
-  <p:cSld>
-    <p:spTree>
-      <p:nvGrpSpPr>
-        <p:cNvPr id="2" name="Shape 2"/>
-        <p:cNvGrpSpPr/>
-        <p:nvPr/>
-      </p:nvGrpSpPr>
-      <p:grpSpPr>
-        <a:xfrm>
-          <a:off x="0" y="0"/>
-          <a:ext cx="0" cy="0"/>
-          <a:chOff x="0" y="0"/>
-          <a:chExt cx="0" cy="0"/>
-        </a:xfrm>
-      </p:grpSpPr>
-      <p:sp>
-        <p:nvSpPr>
-          <p:cNvPr id="3" name="Google Shape;3;n"/>
-          <p:cNvSpPr/>
-          <p:nvPr>
-            <p:ph idx="2" type="sldImg"/>
-          </p:nvPr>
-        </p:nvSpPr>
-        <p:spPr>
-          <a:xfrm>
-            <a:off x="381300" y="685800"/>
-            <a:ext cx="6096075" cy="3429000"/>
-          </a:xfrm>
-          <a:custGeom>
-            <a:rect b="b" l="l" r="r" t="t"/>
-            <a:pathLst>
-              <a:path extrusionOk="0" h="120000" w="120000">
-                <a:moveTo>
-                  <a:pt x="0" y="0"/>
-                </a:moveTo>
-                <a:lnTo>
-                  <a:pt x="120000" y="0"/>
-                </a:lnTo>
-                <a:lnTo>
-                  <a:pt x="120000" y="120000"/>
-                </a:lnTo>
-                <a:lnTo>
-                  <a:pt x="0" y="120000"/>
-                </a:lnTo>
-                <a:close/>
-              </a:path>
-            </a:pathLst>
-          </a:custGeom>
-          <a:noFill/>
-          <a:ln cap="flat" cmpd="sng" w="9525">
-            <a:solidFill>
-              <a:srgbClr val="000000"/>
-            </a:solidFill>
-            <a:prstDash val="solid"/>
-            <a:round/>
-            <a:headEnd len="sm" w="sm" type="none"/>
-            <a:tailEnd len="sm" w="sm" type="none"/>
-          </a:ln>
-        </p:spPr>
-      </p:sp>
-      <p:sp>
-        <p:nvSpPr>
-          <p:cNvPr id="4" name="Google Shape;4;n"/>
-          <p:cNvSpPr txBox="1"/>
-          <p:nvPr>
-            <p:ph idx="1" type="body"/>
-          </p:nvPr>
-        </p:nvSpPr>
-        <p:spPr>
-          <a:xfrm>
-            <a:off x="685800" y="4343400"/>
-            <a:ext cx="5486400" cy="4114800"/>
-          </a:xfrm>
-          <a:prstGeom prst="rect">
-            <a:avLst/>
-          </a:prstGeom>
-          <a:noFill/>
-          <a:ln>
-            <a:noFill/>
-          </a:ln>
-        </p:spPr>
-        <p:txBody>
-          <a:bodyPr anchorCtr="0" anchor="t" bIns="91425" lIns="91425" spcFirstLastPara="1" rIns="91425" wrap="square" tIns="91425">
-            <a:noAutofit/>
-          </a:bodyPr>
-          <a:lstStyle>
-            <a:lvl1pPr indent="-298450" lvl="0" marL="457200">
-              <a:spcBef>
-                <a:spcPts val="0"/>
-              </a:spcBef>
-              <a:spcAft>
-                <a:spcPts val="0"/>
-              </a:spcAft>
-              <a:buSzPts val="1100"/>
-              <a:buChar char="●"/>
-              <a:defRPr sz="1100"/>
-            </a:lvl1pPr>
-            <a:lvl2pPr indent="-298450" lvl="1" marL="914400">
-              <a:spcBef>
-                <a:spcPts val="0"/>
-              </a:spcBef>
-              <a:spcAft>
-                <a:spcPts val="0"/>
-              </a:spcAft>
-              <a:buSzPts val="1100"/>
-              <a:buChar char="○"/>
-              <a:defRPr sz="1100"/>
-            </a:lvl2pPr>
-            <a:lvl3pPr indent="-298450" lvl="2" marL="1371600">
-              <a:spcBef>
-                <a:spcPts val="0"/>
-              </a:spcBef>
-              <a:spcAft>
-                <a:spcPts val="0"/>
-              </a:spcAft>
-              <a:buSzPts val="1100"/>
-              <a:buChar char="■"/>
-              <a:defRPr sz="1100"/>
-            </a:lvl3pPr>
-            <a:lvl4pPr indent="-298450" lvl="3" marL="1828800">
-              <a:spcBef>
-                <a:spcPts val="0"/>
-              </a:spcBef>
-              <a:spcAft>
-                <a:spcPts val="0"/>
-              </a:spcAft>
-              <a:buSzPts val="1100"/>
-              <a:buChar char="●"/>
-              <a:defRPr sz="1100"/>
-            </a:lvl4pPr>
-            <a:lvl5pPr indent="-298450" lvl="4" marL="2286000">
-              <a:spcBef>
-                <a:spcPts val="0"/>
-              </a:spcBef>
-              <a:spcAft>
-                <a:spcPts val="0"/>
-              </a:spcAft>
-              <a:buSzPts val="1100"/>
-              <a:buChar char="○"/>
-              <a:defRPr sz="1100"/>
-            </a:lvl5pPr>
-            <a:lvl6pPr indent="-298450" lvl="5" marL="2743200">
-              <a:spcBef>
-                <a:spcPts val="0"/>
-              </a:spcBef>
-              <a:spcAft>
-                <a:spcPts val="0"/>
-              </a:spcAft>
-              <a:buSzPts val="1100"/>
-              <a:buChar char="■"/>
-              <a:defRPr sz="1100"/>
-            </a:lvl6pPr>
-            <a:lvl7pPr indent="-298450" lvl="6" marL="3200400">
-              <a:spcBef>
-                <a:spcPts val="0"/>
-              </a:spcBef>
-              <a:spcAft>
-                <a:spcPts val="0"/>
-              </a:spcAft>
-              <a:buSzPts val="1100"/>
-              <a:buChar char="●"/>
-              <a:defRPr sz="1100"/>
-            </a:lvl7pPr>
-            <a:lvl8pPr indent="-298450" lvl="7" marL="3657600">
-              <a:spcBef>
-                <a:spcPts val="0"/>
-              </a:spcBef>
-              <a:spcAft>
-                <a:spcPts val="0"/>
-              </a:spcAft>
-              <a:buSzPts val="1100"/>
-              <a:buChar char="○"/>
-              <a:defRPr sz="1100"/>
-            </a:lvl8pPr>
-            <a:lvl9pPr indent="-298450" lvl="8" marL="4114800">
-              <a:spcBef>
-                <a:spcPts val="0"/>
-              </a:spcBef>
-              <a:spcAft>
-                <a:spcPts val="0"/>
-              </a:spcAft>
-              <a:buSzPts val="1100"/>
-              <a:buChar char="■"/>
-              <a:defRPr sz="1100"/>
-            </a:lvl9pPr>
-          </a:lstStyle>
-          <a:p/>
-        </p:txBody>
-      </p:sp>
-    </p:spTree>
-  </p:cSld>
-  <p:clrMap accent1="accent1" accent2="accent2" accent3="accent3" accent4="accent4" accent5="accent5" accent6="accent6" bg1="lt1" bg2="dk2" tx1="dk1" tx2="lt2" folHlink="folHlink" hlink="hlink"/>
-  <p:notesStyle>
-    <a:defPPr lvl="0" marR="0" rtl="0" algn="l">
-      <a:lnSpc>
-        <a:spcPct val="100000"/>
-      </a:lnSpc>
-      <a:spcBef>
-        <a:spcPts val="0"/>
-      </a:spcBef>
-      <a:spcAft>
-        <a:spcPts val="0"/>
-      </a:spcAft>
-    </a:defPPr>
-    <a:lvl1pPr lvl="0" marR="0" rtl="0" algn="l">
-      <a:lnSpc>
-        <a:spcPct val="100000"/>
-      </a:lnSpc>
-      <a:spcBef>
-        <a:spcPts val="0"/>
-      </a:spcBef>
-      <a:spcAft>
-        <a:spcPts val="0"/>
-      </a:spcAft>
-      <a:buClr>
-        <a:srgbClr val="000000"/>
-      </a:buClr>
-      <a:buFont typeface="Arial"/>
-      <a:defRPr b="0" i="0" sz="1400" u="none" cap="none" strike="noStrike">
-        <a:solidFill>
-          <a:srgbClr val="000000"/>
-        </a:solidFill>
-        <a:latin typeface="Arial"/>
-        <a:ea typeface="Arial"/>
-        <a:cs typeface="Arial"/>
-        <a:sym typeface="Arial"/>
-      </a:defRPr>
-    </a:lvl1pPr>
-    <a:lvl2pPr lvl="1" marR="0" rtl="0" algn="l">
-      <a:lnSpc>
-        <a:spcPct val="100000"/>
-      </a:lnSpc>
-      <a:spcBef>
-        <a:spcPts val="0"/>
-      </a:spcBef>
-      <a:spcAft>
-        <a:spcPts val="0"/>
-      </a:spcAft>
-      <a:buClr>
-        <a:srgbClr val="000000"/>
-      </a:buClr>
-      <a:buFont typeface="Arial"/>
-      <a:defRPr b="0" i="0" sz="1400" u="none" cap="none" strike="noStrike">
-        <a:solidFill>
-          <a:srgbClr val="000000"/>
-        </a:solidFill>
-        <a:latin typeface="Arial"/>
-        <a:ea typeface="Arial"/>
-        <a:cs typeface="Arial"/>
-        <a:sym typeface="Arial"/>
-      </a:defRPr>
-    </a:lvl2pPr>
-    <a:lvl3pPr lvl="2" marR="0" rtl="0" algn="l">
-      <a:lnSpc>
-        <a:spcPct val="100000"/>
-      </a:lnSpc>
-      <a:spcBef>
-        <a:spcPts val="0"/>
-      </a:spcBef>
-      <a:spcAft>
-        <a:spcPts val="0"/>
-      </a:spcAft>
-      <a:buClr>
-        <a:srgbClr val="000000"/>
-      </a:buClr>
-      <a:buFont typeface="Arial"/>
-      <a:defRPr b="0" i="0" sz="1400" u="none" cap="none" strike="noStrike">
-        <a:solidFill>
-          <a:srgbClr val="000000"/>
-        </a:solidFill>
-        <a:latin typeface="Arial"/>
-        <a:ea typeface="Arial"/>
-        <a:cs typeface="Arial"/>
-        <a:sym typeface="Arial"/>
-      </a:defRPr>
-    </a:lvl3pPr>
-    <a:lvl4pPr lvl="3" marR="0" rtl="0" algn="l">
-      <a:lnSpc>
-        <a:spcPct val="100000"/>
-      </a:lnSpc>
-      <a:spcBef>
-        <a:spcPts val="0"/>
-      </a:spcBef>
-      <a:spcAft>
-        <a:spcPts val="0"/>
-      </a:spcAft>
-      <a:buClr>
-        <a:srgbClr val="000000"/>
-      </a:buClr>
-      <a:buFont typeface="Arial"/>
-      <a:defRPr b="0" i="0" sz="1400" u="none" cap="none" strike="noStrike">
-        <a:solidFill>
-          <a:srgbClr val="000000"/>
-        </a:solidFill>
-        <a:latin typeface="Arial"/>
-        <a:ea typeface="Arial"/>
-        <a:cs typeface="Arial"/>
-        <a:sym typeface="Arial"/>
-      </a:defRPr>
-    </a:lvl4pPr>
-    <a:lvl5pPr lvl="4" marR="0" rtl="0" algn="l">
-      <a:lnSpc>
-        <a:spcPct val="100000"/>
-      </a:lnSpc>
-      <a:spcBef>
-        <a:spcPts val="0"/>
-      </a:spcBef>
-      <a:spcAft>
-        <a:spcPts val="0"/>
-      </a:spcAft>
-      <a:buClr>
-        <a:srgbClr val="000000"/>
-      </a:buClr>
-      <a:buFont typeface="Arial"/>
-      <a:defRPr b="0" i="0" sz="1400" u="none" cap="none" strike="noStrike">
-        <a:solidFill>
-          <a:srgbClr val="000000"/>
-        </a:solidFill>
-        <a:latin typeface="Arial"/>
-        <a:ea typeface="Arial"/>
-        <a:cs typeface="Arial"/>
-        <a:sym typeface="Arial"/>
-      </a:defRPr>
-    </a:lvl5pPr>
-    <a:lvl6pPr lvl="5" marR="0" rtl="0" algn="l">
-      <a:lnSpc>
-        <a:spcPct val="100000"/>
-      </a:lnSpc>
-      <a:spcBef>
-        <a:spcPts val="0"/>
-      </a:spcBef>
-      <a:spcAft>
-        <a:spcPts val="0"/>
-      </a:spcAft>
-      <a:buClr>
-        <a:srgbClr val="000000"/>
-      </a:buClr>
-      <a:buFont typeface="Arial"/>
-      <a:defRPr b="0" i="0" sz="1400" u="none" cap="none" strike="noStrike">
-        <a:solidFill>
-          <a:srgbClr val="000000"/>
-        </a:solidFill>
-        <a:latin typeface="Arial"/>
-        <a:ea typeface="Arial"/>
-        <a:cs typeface="Arial"/>
-        <a:sym typeface="Arial"/>
-      </a:defRPr>
-    </a:lvl6pPr>
-    <a:lvl7pPr lvl="6" marR="0" rtl="0" algn="l">
-      <a:lnSpc>
-        <a:spcPct val="100000"/>
-      </a:lnSpc>
-      <a:spcBef>
-        <a:spcPts val="0"/>
-      </a:spcBef>
-      <a:spcAft>
-        <a:spcPts val="0"/>
-      </a:spcAft>
-      <a:buClr>
-        <a:srgbClr val="000000"/>
-      </a:buClr>
-      <a:buFont typeface="Arial"/>
-      <a:defRPr b="0" i="0" sz="1400" u="none" cap="none" strike="noStrike">
-        <a:solidFill>
-          <a:srgbClr val="000000"/>
-        </a:solidFill>
-        <a:latin typeface="Arial"/>
-        <a:ea typeface="Arial"/>
-        <a:cs typeface="Arial"/>
-        <a:sym typeface="Arial"/>
-      </a:defRPr>
-    </a:lvl7pPr>
-    <a:lvl8pPr lvl="7" marR="0" rtl="0" algn="l">
-      <a:lnSpc>
-        <a:spcPct val="100000"/>
-      </a:lnSpc>
-      <a:spcBef>
-        <a:spcPts val="0"/>
-      </a:spcBef>
-      <a:spcAft>
-        <a:spcPts val="0"/>
-      </a:spcAft>
-      <a:buClr>
-        <a:srgbClr val="000000"/>
-      </a:buClr>
-      <a:buFont typeface="Arial"/>
-      <a:defRPr b="0" i="0" sz="1400" u="none" cap="none" strike="noStrike">
-        <a:solidFill>
-          <a:srgbClr val="000000"/>
-        </a:solidFill>
-        <a:latin typeface="Arial"/>
-        <a:ea typeface="Arial"/>
-        <a:cs typeface="Arial"/>
-        <a:sym typeface="Arial"/>
-      </a:defRPr>
-    </a:lvl8pPr>
-    <a:lvl9pPr lvl="8" marR="0" rtl="0" algn="l">
-      <a:lnSpc>
-        <a:spcPct val="100000"/>
-      </a:lnSpc>
-      <a:spcBef>
-        <a:spcPts val="0"/>
-      </a:spcBef>
-      <a:spcAft>
-        <a:spcPts val="0"/>
-      </a:spcAft>
-      <a:buClr>
-        <a:srgbClr val="000000"/>
-      </a:buClr>
-      <a:buFont typeface="Arial"/>
-      <a:defRPr b="0" i="0" sz="1400" u="none" cap="none" strike="noStrike">
-        <a:solidFill>
-          <a:srgbClr val="000000"/>
-        </a:solidFill>
-        <a:latin typeface="Arial"/>
-        <a:ea typeface="Arial"/>
-        <a:cs typeface="Arial"/>
-        <a:sym typeface="Arial"/>
-      </a:defRPr>
-    </a:lvl9pPr>
-  </p:notesStyle>
-</p:notesMaster>
-</file>
-
-<file path=ppt/notesSlides/notesSlide1.xml><?xml version="1.0" encoding="utf-8"?>
-<p:notes xmlns:a="http://schemas.openxmlformats.org/drawingml/2006/main" xmlns:r="http://schemas.openxmlformats.org/officeDocument/2006/relationships" xmlns:mc="http://schemas.openxmlformats.org/markup-compatibility/2006" xmlns:mv="urn:schemas-microsoft-com:mac:vml" xmlns:p="http://schemas.openxmlformats.org/presentationml/2006/main" xmlns:c="http://schemas.openxmlformats.org/drawingml/2006/chart" xmlns:dgm="http://schemas.openxmlformats.org/drawingml/2006/diagram" xmlns:o="urn:schemas-microsoft-com:office:office" xmlns:v="urn:schemas-microsoft-com:vml" xmlns:pvml="urn:schemas-microsoft-com:office:powerpoint" xmlns:com="http://schemas.openxmlformats.org/drawingml/2006/compatibility" xmlns:p14="http://schemas.microsoft.com/office/powerpoint/2010/main" xmlns:p15="http://schemas.microsoft.com/office/powerpoint/2012/main" xmlns:ahyp="http://schemas.microsoft.com/office/drawing/2018/hyperlinkcolor" showMasterPhAnim="0" showMasterSp="0">
-  <p:cSld>
-    <p:spTree>
-      <p:nvGrpSpPr>
-        <p:cNvPr id="50" name="Shape 50"/>
-        <p:cNvGrpSpPr/>
-        <p:nvPr/>
-      </p:nvGrpSpPr>
-      <p:grpSpPr>
-        <a:xfrm>
-          <a:off x="0" y="0"/>
-          <a:ext cx="0" cy="0"/>
-          <a:chOff x="0" y="0"/>
-          <a:chExt cx="0" cy="0"/>
-        </a:xfrm>
-      </p:grpSpPr>
-      <p:sp>
-        <p:nvSpPr>
-          <p:cNvPr id="51" name="Google Shape;51;p:notes"/>
-          <p:cNvSpPr/>
-          <p:nvPr>
-            <p:ph idx="2" type="sldImg"/>
-          </p:nvPr>
-        </p:nvSpPr>
-        <p:spPr>
-          <a:xfrm>
-            <a:off x="381300" y="685800"/>
-            <a:ext cx="6096075" cy="3429000"/>
-          </a:xfrm>
-          <a:custGeom>
-            <a:rect b="b" l="l" r="r" t="t"/>
-            <a:pathLst>
-              <a:path extrusionOk="0" h="120000" w="120000">
-                <a:moveTo>
-                  <a:pt x="0" y="0"/>
-                </a:moveTo>
-                <a:lnTo>
-                  <a:pt x="120000" y="0"/>
-                </a:lnTo>
-                <a:lnTo>
-                  <a:pt x="120000" y="120000"/>
-                </a:lnTo>
-                <a:lnTo>
-                  <a:pt x="0" y="120000"/>
-                </a:lnTo>
-                <a:close/>
-              </a:path>
-            </a:pathLst>
-          </a:custGeom>
-        </p:spPr>
-      </p:sp>
-      <p:sp>
-        <p:nvSpPr>
-          <p:cNvPr id="52" name="Google Shape;52;p:notes"/>
-          <p:cNvSpPr txBox="1"/>
-          <p:nvPr>
-            <p:ph idx="1" type="body"/>
-          </p:nvPr>
-        </p:nvSpPr>
-        <p:spPr>
-          <a:xfrm>
-            <a:off x="685800" y="4343400"/>
-            <a:ext cx="5486400" cy="4114800"/>
-          </a:xfrm>
-          <a:prstGeom prst="rect">
-            <a:avLst/>
-          </a:prstGeom>
-        </p:spPr>
-        <p:txBody>
-          <a:bodyPr anchorCtr="0" anchor="t" bIns="91425" lIns="91425" spcFirstLastPara="1" rIns="91425" wrap="square" tIns="91425">
-            <a:noAutofit/>
-          </a:bodyPr>
-          <a:lstStyle/>
-          <a:p>
-            <a:pPr indent="0" lvl="0" marL="0" rtl="0" algn="l">
-              <a:spcBef>
-                <a:spcPts val="0"/>
-              </a:spcBef>
-              <a:spcAft>
-                <a:spcPts val="0"/>
-              </a:spcAft>
-              <a:buNone/>
-            </a:pPr>
-            <a:r>
-              <a:t/>
-            </a:r>
-            <a:endParaRPr/>
-          </a:p>
-        </p:txBody>
-      </p:sp>
-    </p:spTree>
-  </p:cSld>
-  <p:clrMapOvr>
-    <a:masterClrMapping/>
-  </p:clrMapOvr>
-</p:notes>
-</file>
-
-<file path=ppt/notesSlides/notesSlide10.xml><?xml version="1.0" encoding="utf-8"?>
-<p:notes xmlns:a="http://schemas.openxmlformats.org/drawingml/2006/main" xmlns:r="http://schemas.openxmlformats.org/officeDocument/2006/relationships" xmlns:mc="http://schemas.openxmlformats.org/markup-compatibility/2006" xmlns:mv="urn:schemas-microsoft-com:mac:vml" xmlns:p="http://schemas.openxmlformats.org/presentationml/2006/main" xmlns:c="http://schemas.openxmlformats.org/drawingml/2006/chart" xmlns:dgm="http://schemas.openxmlformats.org/drawingml/2006/diagram" xmlns:o="urn:schemas-microsoft-com:office:office" xmlns:v="urn:schemas-microsoft-com:vml" xmlns:pvml="urn:schemas-microsoft-com:office:powerpoint" xmlns:com="http://schemas.openxmlformats.org/drawingml/2006/compatibility" xmlns:p14="http://schemas.microsoft.com/office/powerpoint/2010/main" xmlns:p15="http://schemas.microsoft.com/office/powerpoint/2012/main" xmlns:ahyp="http://schemas.microsoft.com/office/drawing/2018/hyperlinkcolor" showMasterPhAnim="0" showMasterSp="0">
-  <p:cSld>
-    <p:spTree>
-      <p:nvGrpSpPr>
-        <p:cNvPr id="151" name="Shape 151"/>
-        <p:cNvGrpSpPr/>
-        <p:nvPr/>
-      </p:nvGrpSpPr>
-      <p:grpSpPr>
-        <a:xfrm>
-          <a:off x="0" y="0"/>
-          <a:ext cx="0" cy="0"/>
-          <a:chOff x="0" y="0"/>
-          <a:chExt cx="0" cy="0"/>
-        </a:xfrm>
-      </p:grpSpPr>
-      <p:sp>
-        <p:nvSpPr>
-          <p:cNvPr id="152" name="Google Shape;152;g3c94b0d3aed_3_128:notes"/>
-          <p:cNvSpPr/>
-          <p:nvPr>
-            <p:ph idx="2" type="sldImg"/>
-          </p:nvPr>
-        </p:nvSpPr>
-        <p:spPr>
-          <a:xfrm>
-            <a:off x="381300" y="685800"/>
-            <a:ext cx="6096000" cy="3429000"/>
-          </a:xfrm>
-          <a:custGeom>
-            <a:rect b="b" l="l" r="r" t="t"/>
-            <a:pathLst>
-              <a:path extrusionOk="0" h="120000" w="120000">
-                <a:moveTo>
-                  <a:pt x="0" y="0"/>
-                </a:moveTo>
-                <a:lnTo>
-                  <a:pt x="120000" y="0"/>
-                </a:lnTo>
-                <a:lnTo>
-                  <a:pt x="120000" y="120000"/>
-                </a:lnTo>
-                <a:lnTo>
-                  <a:pt x="0" y="120000"/>
-                </a:lnTo>
-                <a:close/>
-              </a:path>
-            </a:pathLst>
-          </a:custGeom>
-        </p:spPr>
-      </p:sp>
-      <p:sp>
-        <p:nvSpPr>
-          <p:cNvPr id="153" name="Google Shape;153;g3c94b0d3aed_3_128:notes"/>
-          <p:cNvSpPr txBox="1"/>
-          <p:nvPr>
-            <p:ph idx="1" type="body"/>
-          </p:nvPr>
-        </p:nvSpPr>
-        <p:spPr>
-          <a:xfrm>
-            <a:off x="685800" y="4343400"/>
-            <a:ext cx="5486400" cy="4114800"/>
-          </a:xfrm>
-          <a:prstGeom prst="rect">
-            <a:avLst/>
-          </a:prstGeom>
-        </p:spPr>
-        <p:txBody>
-          <a:bodyPr anchorCtr="0" anchor="t" bIns="91425" lIns="91425" spcFirstLastPara="1" rIns="91425" wrap="square" tIns="91425">
-            <a:noAutofit/>
-          </a:bodyPr>
-          <a:lstStyle/>
-          <a:p>
-            <a:pPr indent="0" lvl="0" marL="0" rtl="0" algn="l">
-              <a:spcBef>
-                <a:spcPts val="0"/>
-              </a:spcBef>
-              <a:spcAft>
-                <a:spcPts val="0"/>
-              </a:spcAft>
-              <a:buNone/>
-            </a:pPr>
-            <a:r>
-              <a:t/>
-            </a:r>
-            <a:endParaRPr/>
-          </a:p>
-        </p:txBody>
-      </p:sp>
-    </p:spTree>
-  </p:cSld>
-  <p:clrMapOvr>
-    <a:masterClrMapping/>
-  </p:clrMapOvr>
-</p:notes>
-</file>
-
-<file path=ppt/notesSlides/notesSlide11.xml><?xml version="1.0" encoding="utf-8"?>
-<p:notes xmlns:a="http://schemas.openxmlformats.org/drawingml/2006/main" xmlns:r="http://schemas.openxmlformats.org/officeDocument/2006/relationships" xmlns:mc="http://schemas.openxmlformats.org/markup-compatibility/2006" xmlns:mv="urn:schemas-microsoft-com:mac:vml" xmlns:p="http://schemas.openxmlformats.org/presentationml/2006/main" xmlns:c="http://schemas.openxmlformats.org/drawingml/2006/chart" xmlns:dgm="http://schemas.openxmlformats.org/drawingml/2006/diagram" xmlns:o="urn:schemas-microsoft-com:office:office" xmlns:v="urn:schemas-microsoft-com:vml" xmlns:pvml="urn:schemas-microsoft-com:office:powerpoint" xmlns:com="http://schemas.openxmlformats.org/drawingml/2006/compatibility" xmlns:p14="http://schemas.microsoft.com/office/powerpoint/2010/main" xmlns:p15="http://schemas.microsoft.com/office/powerpoint/2012/main" xmlns:ahyp="http://schemas.microsoft.com/office/drawing/2018/hyperlinkcolor" showMasterPhAnim="0" showMasterSp="0">
-  <p:cSld>
-    <p:spTree>
-      <p:nvGrpSpPr>
-        <p:cNvPr id="167" name="Shape 167"/>
-        <p:cNvGrpSpPr/>
-        <p:nvPr/>
-      </p:nvGrpSpPr>
-      <p:grpSpPr>
-        <a:xfrm>
-          <a:off x="0" y="0"/>
-          <a:ext cx="0" cy="0"/>
-          <a:chOff x="0" y="0"/>
-          <a:chExt cx="0" cy="0"/>
-        </a:xfrm>
-      </p:grpSpPr>
-      <p:sp>
-        <p:nvSpPr>
-          <p:cNvPr id="168" name="Google Shape;168;g3c94b0d3aed_3_177:notes"/>
-          <p:cNvSpPr/>
-          <p:nvPr>
-            <p:ph idx="2" type="sldImg"/>
-          </p:nvPr>
-        </p:nvSpPr>
-        <p:spPr>
-          <a:xfrm>
-            <a:off x="381300" y="685800"/>
-            <a:ext cx="6096000" cy="3429000"/>
-          </a:xfrm>
-          <a:custGeom>
-            <a:rect b="b" l="l" r="r" t="t"/>
-            <a:pathLst>
-              <a:path extrusionOk="0" h="120000" w="120000">
-                <a:moveTo>
-                  <a:pt x="0" y="0"/>
-                </a:moveTo>
-                <a:lnTo>
-                  <a:pt x="120000" y="0"/>
-                </a:lnTo>
-                <a:lnTo>
-                  <a:pt x="120000" y="120000"/>
-                </a:lnTo>
-                <a:lnTo>
-                  <a:pt x="0" y="120000"/>
-                </a:lnTo>
-                <a:close/>
-              </a:path>
-            </a:pathLst>
-          </a:custGeom>
-        </p:spPr>
-      </p:sp>
-      <p:sp>
-        <p:nvSpPr>
-          <p:cNvPr id="169" name="Google Shape;169;g3c94b0d3aed_3_177:notes"/>
-          <p:cNvSpPr txBox="1"/>
-          <p:nvPr>
-            <p:ph idx="1" type="body"/>
-          </p:nvPr>
-        </p:nvSpPr>
-        <p:spPr>
-          <a:xfrm>
-            <a:off x="685800" y="4343400"/>
-            <a:ext cx="5486400" cy="4114800"/>
-          </a:xfrm>
-          <a:prstGeom prst="rect">
-            <a:avLst/>
-          </a:prstGeom>
-        </p:spPr>
-        <p:txBody>
-          <a:bodyPr anchorCtr="0" anchor="t" bIns="91425" lIns="91425" spcFirstLastPara="1" rIns="91425" wrap="square" tIns="91425">
-            <a:noAutofit/>
-          </a:bodyPr>
-          <a:lstStyle/>
-          <a:p>
-            <a:pPr indent="0" lvl="0" marL="0" rtl="0" algn="l">
-              <a:spcBef>
-                <a:spcPts val="0"/>
-              </a:spcBef>
-              <a:spcAft>
-                <a:spcPts val="0"/>
-              </a:spcAft>
-              <a:buNone/>
-            </a:pPr>
-            <a:r>
-              <a:t/>
-            </a:r>
-            <a:endParaRPr/>
-          </a:p>
-        </p:txBody>
-      </p:sp>
-    </p:spTree>
-  </p:cSld>
-  <p:clrMapOvr>
-    <a:masterClrMapping/>
-  </p:clrMapOvr>
-</p:notes>
-</file>
-
-<file path=ppt/notesSlides/notesSlide12.xml><?xml version="1.0" encoding="utf-8"?>
-<p:notes xmlns:a="http://schemas.openxmlformats.org/drawingml/2006/main" xmlns:r="http://schemas.openxmlformats.org/officeDocument/2006/relationships" xmlns:mc="http://schemas.openxmlformats.org/markup-compatibility/2006" xmlns:mv="urn:schemas-microsoft-com:mac:vml" xmlns:p="http://schemas.openxmlformats.org/presentationml/2006/main" xmlns:c="http://schemas.openxmlformats.org/drawingml/2006/chart" xmlns:dgm="http://schemas.openxmlformats.org/drawingml/2006/diagram" xmlns:o="urn:schemas-microsoft-com:office:office" xmlns:v="urn:schemas-microsoft-com:vml" xmlns:pvml="urn:schemas-microsoft-com:office:powerpoint" xmlns:com="http://schemas.openxmlformats.org/drawingml/2006/compatibility" xmlns:p14="http://schemas.microsoft.com/office/powerpoint/2010/main" xmlns:p15="http://schemas.microsoft.com/office/powerpoint/2012/main" xmlns:ahyp="http://schemas.microsoft.com/office/drawing/2018/hyperlinkcolor" showMasterPhAnim="0" showMasterSp="0">
-  <p:cSld>
-    <p:spTree>
-      <p:nvGrpSpPr>
-        <p:cNvPr id="183" name="Shape 183"/>
-        <p:cNvGrpSpPr/>
-        <p:nvPr/>
-      </p:nvGrpSpPr>
-      <p:grpSpPr>
-        <a:xfrm>
-          <a:off x="0" y="0"/>
-          <a:ext cx="0" cy="0"/>
-          <a:chOff x="0" y="0"/>
-          <a:chExt cx="0" cy="0"/>
-        </a:xfrm>
-      </p:grpSpPr>
-      <p:sp>
-        <p:nvSpPr>
-          <p:cNvPr id="184" name="Google Shape;184;g3c94b0d3aed_3_247:notes"/>
-          <p:cNvSpPr/>
-          <p:nvPr>
-            <p:ph idx="2" type="sldImg"/>
-          </p:nvPr>
-        </p:nvSpPr>
-        <p:spPr>
-          <a:xfrm>
-            <a:off x="381300" y="685800"/>
-            <a:ext cx="6096000" cy="3429000"/>
-          </a:xfrm>
-          <a:custGeom>
-            <a:rect b="b" l="l" r="r" t="t"/>
-            <a:pathLst>
-              <a:path extrusionOk="0" h="120000" w="120000">
-                <a:moveTo>
-                  <a:pt x="0" y="0"/>
-                </a:moveTo>
-                <a:lnTo>
-                  <a:pt x="120000" y="0"/>
-                </a:lnTo>
-                <a:lnTo>
-                  <a:pt x="120000" y="120000"/>
-                </a:lnTo>
-                <a:lnTo>
-                  <a:pt x="0" y="120000"/>
-                </a:lnTo>
-                <a:close/>
-              </a:path>
-            </a:pathLst>
-          </a:custGeom>
-        </p:spPr>
-      </p:sp>
-      <p:sp>
-        <p:nvSpPr>
-          <p:cNvPr id="185" name="Google Shape;185;g3c94b0d3aed_3_247:notes"/>
-          <p:cNvSpPr txBox="1"/>
-          <p:nvPr>
-            <p:ph idx="1" type="body"/>
-          </p:nvPr>
-        </p:nvSpPr>
-        <p:spPr>
-          <a:xfrm>
-            <a:off x="685800" y="4343400"/>
-            <a:ext cx="5486400" cy="4114800"/>
-          </a:xfrm>
-          <a:prstGeom prst="rect">
-            <a:avLst/>
-          </a:prstGeom>
-        </p:spPr>
-        <p:txBody>
-          <a:bodyPr anchorCtr="0" anchor="t" bIns="91425" lIns="91425" spcFirstLastPara="1" rIns="91425" wrap="square" tIns="91425">
-            <a:noAutofit/>
-          </a:bodyPr>
-          <a:lstStyle/>
-          <a:p>
-            <a:pPr indent="0" lvl="0" marL="0" rtl="0" algn="l">
-              <a:spcBef>
-                <a:spcPts val="0"/>
-              </a:spcBef>
-              <a:spcAft>
-                <a:spcPts val="0"/>
-              </a:spcAft>
-              <a:buNone/>
-            </a:pPr>
-            <a:r>
-              <a:t/>
-            </a:r>
-            <a:endParaRPr/>
-          </a:p>
-        </p:txBody>
-      </p:sp>
-    </p:spTree>
-  </p:cSld>
-  <p:clrMapOvr>
-    <a:masterClrMapping/>
-  </p:clrMapOvr>
-</p:notes>
-</file>
-
-<file path=ppt/notesSlides/notesSlide13.xml><?xml version="1.0" encoding="utf-8"?>
-<p:notes xmlns:a="http://schemas.openxmlformats.org/drawingml/2006/main" xmlns:r="http://schemas.openxmlformats.org/officeDocument/2006/relationships" xmlns:mc="http://schemas.openxmlformats.org/markup-compatibility/2006" xmlns:mv="urn:schemas-microsoft-com:mac:vml" xmlns:p="http://schemas.openxmlformats.org/presentationml/2006/main" xmlns:c="http://schemas.openxmlformats.org/drawingml/2006/chart" xmlns:dgm="http://schemas.openxmlformats.org/drawingml/2006/diagram" xmlns:o="urn:schemas-microsoft-com:office:office" xmlns:v="urn:schemas-microsoft-com:vml" xmlns:pvml="urn:schemas-microsoft-com:office:powerpoint" xmlns:com="http://schemas.openxmlformats.org/drawingml/2006/compatibility" xmlns:p14="http://schemas.microsoft.com/office/powerpoint/2010/main" xmlns:p15="http://schemas.microsoft.com/office/powerpoint/2012/main" xmlns:ahyp="http://schemas.microsoft.com/office/drawing/2018/hyperlinkcolor" showMasterPhAnim="0" showMasterSp="0">
-  <p:cSld>
-    <p:spTree>
-      <p:nvGrpSpPr>
-        <p:cNvPr id="200" name="Shape 200"/>
-        <p:cNvGrpSpPr/>
-        <p:nvPr/>
-      </p:nvGrpSpPr>
-      <p:grpSpPr>
-        <a:xfrm>
-          <a:off x="0" y="0"/>
-          <a:ext cx="0" cy="0"/>
-          <a:chOff x="0" y="0"/>
-          <a:chExt cx="0" cy="0"/>
-        </a:xfrm>
-      </p:grpSpPr>
-      <p:sp>
-        <p:nvSpPr>
-          <p:cNvPr id="201" name="Google Shape;201;g3c94b0d3aed_3_266:notes"/>
-          <p:cNvSpPr/>
-          <p:nvPr>
-            <p:ph idx="2" type="sldImg"/>
-          </p:nvPr>
-        </p:nvSpPr>
-        <p:spPr>
-          <a:xfrm>
-            <a:off x="381300" y="685800"/>
-            <a:ext cx="6096000" cy="3429000"/>
-          </a:xfrm>
-          <a:custGeom>
-            <a:rect b="b" l="l" r="r" t="t"/>
-            <a:pathLst>
-              <a:path extrusionOk="0" h="120000" w="120000">
-                <a:moveTo>
-                  <a:pt x="0" y="0"/>
-                </a:moveTo>
-                <a:lnTo>
-                  <a:pt x="120000" y="0"/>
-                </a:lnTo>
-                <a:lnTo>
-                  <a:pt x="120000" y="120000"/>
-                </a:lnTo>
-                <a:lnTo>
-                  <a:pt x="0" y="120000"/>
-                </a:lnTo>
-                <a:close/>
-              </a:path>
-            </a:pathLst>
-          </a:custGeom>
-        </p:spPr>
-      </p:sp>
-      <p:sp>
-        <p:nvSpPr>
-          <p:cNvPr id="202" name="Google Shape;202;g3c94b0d3aed_3_266:notes"/>
-          <p:cNvSpPr txBox="1"/>
-          <p:nvPr>
-            <p:ph idx="1" type="body"/>
-          </p:nvPr>
-        </p:nvSpPr>
-        <p:spPr>
-          <a:xfrm>
-            <a:off x="685800" y="4343400"/>
-            <a:ext cx="5486400" cy="4114800"/>
-          </a:xfrm>
-          <a:prstGeom prst="rect">
-            <a:avLst/>
-          </a:prstGeom>
-        </p:spPr>
-        <p:txBody>
-          <a:bodyPr anchorCtr="0" anchor="t" bIns="91425" lIns="91425" spcFirstLastPara="1" rIns="91425" wrap="square" tIns="91425">
-            <a:noAutofit/>
-          </a:bodyPr>
-          <a:lstStyle/>
-          <a:p>
-            <a:pPr indent="0" lvl="0" marL="0" rtl="0" algn="l">
-              <a:spcBef>
-                <a:spcPts val="0"/>
-              </a:spcBef>
-              <a:spcAft>
-                <a:spcPts val="0"/>
-              </a:spcAft>
-              <a:buNone/>
-            </a:pPr>
-            <a:r>
-              <a:t/>
-            </a:r>
-            <a:endParaRPr/>
-          </a:p>
-        </p:txBody>
-      </p:sp>
-    </p:spTree>
-  </p:cSld>
-  <p:clrMapOvr>
-    <a:masterClrMapping/>
-  </p:clrMapOvr>
-</p:notes>
-</file>
-
-<file path=ppt/notesSlides/notesSlide14.xml><?xml version="1.0" encoding="utf-8"?>
-<p:notes xmlns:a="http://schemas.openxmlformats.org/drawingml/2006/main" xmlns:r="http://schemas.openxmlformats.org/officeDocument/2006/relationships" xmlns:mc="http://schemas.openxmlformats.org/markup-compatibility/2006" xmlns:mv="urn:schemas-microsoft-com:mac:vml" xmlns:p="http://schemas.openxmlformats.org/presentationml/2006/main" xmlns:c="http://schemas.openxmlformats.org/drawingml/2006/chart" xmlns:dgm="http://schemas.openxmlformats.org/drawingml/2006/diagram" xmlns:o="urn:schemas-microsoft-com:office:office" xmlns:v="urn:schemas-microsoft-com:vml" xmlns:pvml="urn:schemas-microsoft-com:office:powerpoint" xmlns:com="http://schemas.openxmlformats.org/drawingml/2006/compatibility" xmlns:p14="http://schemas.microsoft.com/office/powerpoint/2010/main" xmlns:p15="http://schemas.microsoft.com/office/powerpoint/2012/main" xmlns:ahyp="http://schemas.microsoft.com/office/drawing/2018/hyperlinkcolor" showMasterPhAnim="0" showMasterSp="0">
-  <p:cSld>
-    <p:spTree>
-      <p:nvGrpSpPr>
-        <p:cNvPr id="217" name="Shape 217"/>
-        <p:cNvGrpSpPr/>
-        <p:nvPr/>
-      </p:nvGrpSpPr>
-      <p:grpSpPr>
-        <a:xfrm>
-          <a:off x="0" y="0"/>
-          <a:ext cx="0" cy="0"/>
-          <a:chOff x="0" y="0"/>
-          <a:chExt cx="0" cy="0"/>
-        </a:xfrm>
-      </p:grpSpPr>
-      <p:sp>
-        <p:nvSpPr>
-          <p:cNvPr id="218" name="Google Shape;218;g3c94b0d3aed_3_305:notes"/>
-          <p:cNvSpPr/>
-          <p:nvPr>
-            <p:ph idx="2" type="sldImg"/>
-          </p:nvPr>
-        </p:nvSpPr>
-        <p:spPr>
-          <a:xfrm>
-            <a:off x="381300" y="685800"/>
-            <a:ext cx="6096000" cy="3429000"/>
-          </a:xfrm>
-          <a:custGeom>
-            <a:rect b="b" l="l" r="r" t="t"/>
-            <a:pathLst>
-              <a:path extrusionOk="0" h="120000" w="120000">
-                <a:moveTo>
-                  <a:pt x="0" y="0"/>
-                </a:moveTo>
-                <a:lnTo>
-                  <a:pt x="120000" y="0"/>
-                </a:lnTo>
-                <a:lnTo>
-                  <a:pt x="120000" y="120000"/>
-                </a:lnTo>
-                <a:lnTo>
-                  <a:pt x="0" y="120000"/>
-                </a:lnTo>
-                <a:close/>
-              </a:path>
-            </a:pathLst>
-          </a:custGeom>
-        </p:spPr>
-      </p:sp>
-      <p:sp>
-        <p:nvSpPr>
-          <p:cNvPr id="219" name="Google Shape;219;g3c94b0d3aed_3_305:notes"/>
-          <p:cNvSpPr txBox="1"/>
-          <p:nvPr>
-            <p:ph idx="1" type="body"/>
-          </p:nvPr>
-        </p:nvSpPr>
-        <p:spPr>
-          <a:xfrm>
-            <a:off x="685800" y="4343400"/>
-            <a:ext cx="5486400" cy="4114800"/>
-          </a:xfrm>
-          <a:prstGeom prst="rect">
-            <a:avLst/>
-          </a:prstGeom>
-        </p:spPr>
-        <p:txBody>
-          <a:bodyPr anchorCtr="0" anchor="t" bIns="91425" lIns="91425" spcFirstLastPara="1" rIns="91425" wrap="square" tIns="91425">
-            <a:noAutofit/>
-          </a:bodyPr>
-          <a:lstStyle/>
-          <a:p>
-            <a:pPr indent="0" lvl="0" marL="0" rtl="0" algn="l">
-              <a:spcBef>
-                <a:spcPts val="0"/>
-              </a:spcBef>
-              <a:spcAft>
-                <a:spcPts val="0"/>
-              </a:spcAft>
-              <a:buNone/>
-            </a:pPr>
-            <a:r>
-              <a:t/>
-            </a:r>
-            <a:endParaRPr/>
-          </a:p>
-        </p:txBody>
-      </p:sp>
-    </p:spTree>
-  </p:cSld>
-  <p:clrMapOvr>
-    <a:masterClrMapping/>
-  </p:clrMapOvr>
-</p:notes>
-</file>
-
-<file path=ppt/notesSlides/notesSlide15.xml><?xml version="1.0" encoding="utf-8"?>
-<p:notes xmlns:a="http://schemas.openxmlformats.org/drawingml/2006/main" xmlns:r="http://schemas.openxmlformats.org/officeDocument/2006/relationships" xmlns:mc="http://schemas.openxmlformats.org/markup-compatibility/2006" xmlns:mv="urn:schemas-microsoft-com:mac:vml" xmlns:p="http://schemas.openxmlformats.org/presentationml/2006/main" xmlns:c="http://schemas.openxmlformats.org/drawingml/2006/chart" xmlns:dgm="http://schemas.openxmlformats.org/drawingml/2006/diagram" xmlns:o="urn:schemas-microsoft-com:office:office" xmlns:v="urn:schemas-microsoft-com:vml" xmlns:pvml="urn:schemas-microsoft-com:office:powerpoint" xmlns:com="http://schemas.openxmlformats.org/drawingml/2006/compatibility" xmlns:p14="http://schemas.microsoft.com/office/powerpoint/2010/main" xmlns:p15="http://schemas.microsoft.com/office/powerpoint/2012/main" xmlns:ahyp="http://schemas.microsoft.com/office/drawing/2018/hyperlinkcolor" showMasterPhAnim="0" showMasterSp="0">
-  <p:cSld>
-    <p:spTree>
-      <p:nvGrpSpPr>
-        <p:cNvPr id="232" name="Shape 232"/>
-        <p:cNvGrpSpPr/>
-        <p:nvPr/>
-      </p:nvGrpSpPr>
-      <p:grpSpPr>
-        <a:xfrm>
-          <a:off x="0" y="0"/>
-          <a:ext cx="0" cy="0"/>
-          <a:chOff x="0" y="0"/>
-          <a:chExt cx="0" cy="0"/>
-        </a:xfrm>
-      </p:grpSpPr>
-      <p:sp>
-        <p:nvSpPr>
-          <p:cNvPr id="233" name="Google Shape;233;g3c94b0d3aed_3_285:notes"/>
-          <p:cNvSpPr/>
-          <p:nvPr>
-            <p:ph idx="2" type="sldImg"/>
-          </p:nvPr>
-        </p:nvSpPr>
-        <p:spPr>
-          <a:xfrm>
-            <a:off x="381300" y="685800"/>
-            <a:ext cx="6096000" cy="3429000"/>
-          </a:xfrm>
-          <a:custGeom>
-            <a:rect b="b" l="l" r="r" t="t"/>
-            <a:pathLst>
-              <a:path extrusionOk="0" h="120000" w="120000">
-                <a:moveTo>
-                  <a:pt x="0" y="0"/>
-                </a:moveTo>
-                <a:lnTo>
-                  <a:pt x="120000" y="0"/>
-                </a:lnTo>
-                <a:lnTo>
-                  <a:pt x="120000" y="120000"/>
-                </a:lnTo>
-                <a:lnTo>
-                  <a:pt x="0" y="120000"/>
-                </a:lnTo>
-                <a:close/>
-              </a:path>
-            </a:pathLst>
-          </a:custGeom>
-        </p:spPr>
-      </p:sp>
-      <p:sp>
-        <p:nvSpPr>
-          <p:cNvPr id="234" name="Google Shape;234;g3c94b0d3aed_3_285:notes"/>
-          <p:cNvSpPr txBox="1"/>
-          <p:nvPr>
-            <p:ph idx="1" type="body"/>
-          </p:nvPr>
-        </p:nvSpPr>
-        <p:spPr>
-          <a:xfrm>
-            <a:off x="685800" y="4343400"/>
-            <a:ext cx="5486400" cy="4114800"/>
-          </a:xfrm>
-          <a:prstGeom prst="rect">
-            <a:avLst/>
-          </a:prstGeom>
-        </p:spPr>
-        <p:txBody>
-          <a:bodyPr anchorCtr="0" anchor="t" bIns="91425" lIns="91425" spcFirstLastPara="1" rIns="91425" wrap="square" tIns="91425">
-            <a:noAutofit/>
-          </a:bodyPr>
-          <a:lstStyle/>
-          <a:p>
-            <a:pPr indent="0" lvl="0" marL="0" rtl="0" algn="l">
-              <a:spcBef>
-                <a:spcPts val="0"/>
-              </a:spcBef>
-              <a:spcAft>
-                <a:spcPts val="0"/>
-              </a:spcAft>
-              <a:buNone/>
-            </a:pPr>
-            <a:r>
-              <a:t/>
-            </a:r>
-            <a:endParaRPr/>
-          </a:p>
-        </p:txBody>
-      </p:sp>
-    </p:spTree>
-  </p:cSld>
-  <p:clrMapOvr>
-    <a:masterClrMapping/>
-  </p:clrMapOvr>
-</p:notes>
-</file>
-
-<file path=ppt/notesSlides/notesSlide16.xml><?xml version="1.0" encoding="utf-8"?>
-<p:notes xmlns:a="http://schemas.openxmlformats.org/drawingml/2006/main" xmlns:r="http://schemas.openxmlformats.org/officeDocument/2006/relationships" xmlns:mc="http://schemas.openxmlformats.org/markup-compatibility/2006" xmlns:mv="urn:schemas-microsoft-com:mac:vml" xmlns:p="http://schemas.openxmlformats.org/presentationml/2006/main" xmlns:c="http://schemas.openxmlformats.org/drawingml/2006/chart" xmlns:dgm="http://schemas.openxmlformats.org/drawingml/2006/diagram" xmlns:o="urn:schemas-microsoft-com:office:office" xmlns:v="urn:schemas-microsoft-com:vml" xmlns:pvml="urn:schemas-microsoft-com:office:powerpoint" xmlns:com="http://schemas.openxmlformats.org/drawingml/2006/compatibility" xmlns:p14="http://schemas.microsoft.com/office/powerpoint/2010/main" xmlns:p15="http://schemas.microsoft.com/office/powerpoint/2012/main" xmlns:ahyp="http://schemas.microsoft.com/office/drawing/2018/hyperlinkcolor" showMasterPhAnim="0" showMasterSp="0">
-  <p:cSld>
-    <p:spTree>
-      <p:nvGrpSpPr>
-        <p:cNvPr id="246" name="Shape 246"/>
-        <p:cNvGrpSpPr/>
-        <p:nvPr/>
-      </p:nvGrpSpPr>
-      <p:grpSpPr>
-        <a:xfrm>
-          <a:off x="0" y="0"/>
-          <a:ext cx="0" cy="0"/>
-          <a:chOff x="0" y="0"/>
-          <a:chExt cx="0" cy="0"/>
-        </a:xfrm>
-      </p:grpSpPr>
-      <p:sp>
-        <p:nvSpPr>
-          <p:cNvPr id="247" name="Google Shape;247;g3c94b0d3aed_3_14:notes"/>
-          <p:cNvSpPr/>
-          <p:nvPr>
-            <p:ph idx="2" type="sldImg"/>
-          </p:nvPr>
-        </p:nvSpPr>
-        <p:spPr>
-          <a:xfrm>
-            <a:off x="381300" y="685800"/>
-            <a:ext cx="6096000" cy="3429000"/>
-          </a:xfrm>
-          <a:custGeom>
-            <a:rect b="b" l="l" r="r" t="t"/>
-            <a:pathLst>
-              <a:path extrusionOk="0" h="120000" w="120000">
-                <a:moveTo>
-                  <a:pt x="0" y="0"/>
-                </a:moveTo>
-                <a:lnTo>
-                  <a:pt x="120000" y="0"/>
-                </a:lnTo>
-                <a:lnTo>
-                  <a:pt x="120000" y="120000"/>
-                </a:lnTo>
-                <a:lnTo>
-                  <a:pt x="0" y="120000"/>
-                </a:lnTo>
-                <a:close/>
-              </a:path>
-            </a:pathLst>
-          </a:custGeom>
-        </p:spPr>
-      </p:sp>
-      <p:sp>
-        <p:nvSpPr>
-          <p:cNvPr id="248" name="Google Shape;248;g3c94b0d3aed_3_14:notes"/>
-          <p:cNvSpPr txBox="1"/>
-          <p:nvPr>
-            <p:ph idx="1" type="body"/>
-          </p:nvPr>
-        </p:nvSpPr>
-        <p:spPr>
-          <a:xfrm>
-            <a:off x="685800" y="4343400"/>
-            <a:ext cx="5486400" cy="4114800"/>
-          </a:xfrm>
-          <a:prstGeom prst="rect">
-            <a:avLst/>
-          </a:prstGeom>
-        </p:spPr>
-        <p:txBody>
-          <a:bodyPr anchorCtr="0" anchor="t" bIns="91425" lIns="91425" spcFirstLastPara="1" rIns="91425" wrap="square" tIns="91425">
-            <a:noAutofit/>
-          </a:bodyPr>
-          <a:lstStyle/>
-          <a:p>
-            <a:pPr indent="0" lvl="0" marL="0" rtl="0" algn="l">
-              <a:spcBef>
-                <a:spcPts val="0"/>
-              </a:spcBef>
-              <a:spcAft>
-                <a:spcPts val="0"/>
-              </a:spcAft>
-              <a:buNone/>
-            </a:pPr>
-            <a:r>
-              <a:t/>
-            </a:r>
-            <a:endParaRPr/>
-          </a:p>
-        </p:txBody>
-      </p:sp>
-    </p:spTree>
-  </p:cSld>
-  <p:clrMapOvr>
-    <a:masterClrMapping/>
-  </p:clrMapOvr>
-</p:notes>
-</file>
-
-<file path=ppt/notesSlides/notesSlide17.xml><?xml version="1.0" encoding="utf-8"?>
-<p:notes xmlns:a="http://schemas.openxmlformats.org/drawingml/2006/main" xmlns:r="http://schemas.openxmlformats.org/officeDocument/2006/relationships" xmlns:mc="http://schemas.openxmlformats.org/markup-compatibility/2006" xmlns:mv="urn:schemas-microsoft-com:mac:vml" xmlns:p="http://schemas.openxmlformats.org/presentationml/2006/main" xmlns:c="http://schemas.openxmlformats.org/drawingml/2006/chart" xmlns:dgm="http://schemas.openxmlformats.org/drawingml/2006/diagram" xmlns:o="urn:schemas-microsoft-com:office:office" xmlns:v="urn:schemas-microsoft-com:vml" xmlns:pvml="urn:schemas-microsoft-com:office:powerpoint" xmlns:com="http://schemas.openxmlformats.org/drawingml/2006/compatibility" xmlns:p14="http://schemas.microsoft.com/office/powerpoint/2010/main" xmlns:p15="http://schemas.microsoft.com/office/powerpoint/2012/main" xmlns:ahyp="http://schemas.microsoft.com/office/drawing/2018/hyperlinkcolor" showMasterPhAnim="0" showMasterSp="0">
-  <p:cSld>
-    <p:spTree>
-      <p:nvGrpSpPr>
-        <p:cNvPr id="252" name="Shape 252"/>
-        <p:cNvGrpSpPr/>
-        <p:nvPr/>
-      </p:nvGrpSpPr>
-      <p:grpSpPr>
-        <a:xfrm>
-          <a:off x="0" y="0"/>
-          <a:ext cx="0" cy="0"/>
-          <a:chOff x="0" y="0"/>
-          <a:chExt cx="0" cy="0"/>
-        </a:xfrm>
-      </p:grpSpPr>
-      <p:sp>
-        <p:nvSpPr>
-          <p:cNvPr id="253" name="Google Shape;253;g3c889b9f61b_1_0:notes"/>
-          <p:cNvSpPr/>
-          <p:nvPr>
-            <p:ph idx="2" type="sldImg"/>
-          </p:nvPr>
-        </p:nvSpPr>
-        <p:spPr>
-          <a:xfrm>
-            <a:off x="381300" y="685800"/>
-            <a:ext cx="6096000" cy="3429000"/>
-          </a:xfrm>
-          <a:custGeom>
-            <a:rect b="b" l="l" r="r" t="t"/>
-            <a:pathLst>
-              <a:path extrusionOk="0" h="120000" w="120000">
-                <a:moveTo>
-                  <a:pt x="0" y="0"/>
-                </a:moveTo>
-                <a:lnTo>
-                  <a:pt x="120000" y="0"/>
-                </a:lnTo>
-                <a:lnTo>
-                  <a:pt x="120000" y="120000"/>
-                </a:lnTo>
-                <a:lnTo>
-                  <a:pt x="0" y="120000"/>
-                </a:lnTo>
-                <a:close/>
-              </a:path>
-            </a:pathLst>
-          </a:custGeom>
-        </p:spPr>
-      </p:sp>
-      <p:sp>
-        <p:nvSpPr>
-          <p:cNvPr id="254" name="Google Shape;254;g3c889b9f61b_1_0:notes"/>
-          <p:cNvSpPr txBox="1"/>
-          <p:nvPr>
-            <p:ph idx="1" type="body"/>
-          </p:nvPr>
-        </p:nvSpPr>
-        <p:spPr>
-          <a:xfrm>
-            <a:off x="685800" y="4343400"/>
-            <a:ext cx="5486400" cy="4114800"/>
-          </a:xfrm>
-          <a:prstGeom prst="rect">
-            <a:avLst/>
-          </a:prstGeom>
-        </p:spPr>
-        <p:txBody>
-          <a:bodyPr anchorCtr="0" anchor="t" bIns="91425" lIns="91425" spcFirstLastPara="1" rIns="91425" wrap="square" tIns="91425">
-            <a:noAutofit/>
-          </a:bodyPr>
-          <a:lstStyle/>
-          <a:p>
-            <a:pPr indent="0" lvl="0" marL="0" rtl="0" algn="l">
-              <a:spcBef>
-                <a:spcPts val="0"/>
-              </a:spcBef>
-              <a:spcAft>
-                <a:spcPts val="0"/>
-              </a:spcAft>
-              <a:buNone/>
-            </a:pPr>
-            <a:r>
-              <a:t/>
-            </a:r>
-            <a:endParaRPr/>
-          </a:p>
-        </p:txBody>
-      </p:sp>
-    </p:spTree>
-  </p:cSld>
-  <p:clrMapOvr>
-    <a:masterClrMapping/>
-  </p:clrMapOvr>
-</p:notes>
-</file>
-
-<file path=ppt/notesSlides/notesSlide18.xml><?xml version="1.0" encoding="utf-8"?>
-<p:notes xmlns:a="http://schemas.openxmlformats.org/drawingml/2006/main" xmlns:r="http://schemas.openxmlformats.org/officeDocument/2006/relationships" xmlns:mc="http://schemas.openxmlformats.org/markup-compatibility/2006" xmlns:mv="urn:schemas-microsoft-com:mac:vml" xmlns:p="http://schemas.openxmlformats.org/presentationml/2006/main" xmlns:c="http://schemas.openxmlformats.org/drawingml/2006/chart" xmlns:dgm="http://schemas.openxmlformats.org/drawingml/2006/diagram" xmlns:o="urn:schemas-microsoft-com:office:office" xmlns:v="urn:schemas-microsoft-com:vml" xmlns:pvml="urn:schemas-microsoft-com:office:powerpoint" xmlns:com="http://schemas.openxmlformats.org/drawingml/2006/compatibility" xmlns:p14="http://schemas.microsoft.com/office/powerpoint/2010/main" xmlns:p15="http://schemas.microsoft.com/office/powerpoint/2012/main" xmlns:ahyp="http://schemas.microsoft.com/office/drawing/2018/hyperlinkcolor" showMasterPhAnim="0" showMasterSp="0">
-  <p:cSld>
-    <p:spTree>
-      <p:nvGrpSpPr>
-        <p:cNvPr id="258" name="Shape 258"/>
-        <p:cNvGrpSpPr/>
-        <p:nvPr/>
-      </p:nvGrpSpPr>
-      <p:grpSpPr>
-        <a:xfrm>
-          <a:off x="0" y="0"/>
-          <a:ext cx="0" cy="0"/>
-          <a:chOff x="0" y="0"/>
-          <a:chExt cx="0" cy="0"/>
-        </a:xfrm>
-      </p:grpSpPr>
-      <p:sp>
-        <p:nvSpPr>
-          <p:cNvPr id="259" name="Google Shape;259;g3c889b9f61b_2_0:notes"/>
-          <p:cNvSpPr/>
-          <p:nvPr>
-            <p:ph idx="2" type="sldImg"/>
-          </p:nvPr>
-        </p:nvSpPr>
-        <p:spPr>
-          <a:xfrm>
-            <a:off x="381300" y="685800"/>
-            <a:ext cx="6096000" cy="3429000"/>
-          </a:xfrm>
-          <a:custGeom>
-            <a:rect b="b" l="l" r="r" t="t"/>
-            <a:pathLst>
-              <a:path extrusionOk="0" h="120000" w="120000">
-                <a:moveTo>
-                  <a:pt x="0" y="0"/>
-                </a:moveTo>
-                <a:lnTo>
-                  <a:pt x="120000" y="0"/>
-                </a:lnTo>
-                <a:lnTo>
-                  <a:pt x="120000" y="120000"/>
-                </a:lnTo>
-                <a:lnTo>
-                  <a:pt x="0" y="120000"/>
-                </a:lnTo>
-                <a:close/>
-              </a:path>
-            </a:pathLst>
-          </a:custGeom>
-        </p:spPr>
-      </p:sp>
-      <p:sp>
-        <p:nvSpPr>
-          <p:cNvPr id="260" name="Google Shape;260;g3c889b9f61b_2_0:notes"/>
-          <p:cNvSpPr txBox="1"/>
-          <p:nvPr>
-            <p:ph idx="1" type="body"/>
-          </p:nvPr>
-        </p:nvSpPr>
-        <p:spPr>
-          <a:xfrm>
-            <a:off x="685800" y="4343400"/>
-            <a:ext cx="5486400" cy="4114800"/>
-          </a:xfrm>
-          <a:prstGeom prst="rect">
-            <a:avLst/>
-          </a:prstGeom>
-        </p:spPr>
-        <p:txBody>
-          <a:bodyPr anchorCtr="0" anchor="t" bIns="91425" lIns="91425" spcFirstLastPara="1" rIns="91425" wrap="square" tIns="91425">
-            <a:noAutofit/>
-          </a:bodyPr>
-          <a:lstStyle/>
-          <a:p>
-            <a:pPr indent="0" lvl="0" marL="0" rtl="0" algn="l">
-              <a:spcBef>
-                <a:spcPts val="0"/>
-              </a:spcBef>
-              <a:spcAft>
-                <a:spcPts val="0"/>
-              </a:spcAft>
-              <a:buNone/>
-            </a:pPr>
-            <a:r>
-              <a:t/>
-            </a:r>
-            <a:endParaRPr/>
-          </a:p>
-        </p:txBody>
-      </p:sp>
-    </p:spTree>
-  </p:cSld>
-  <p:clrMapOvr>
-    <a:masterClrMapping/>
-  </p:clrMapOvr>
-</p:notes>
-</file>
-
-<file path=ppt/notesSlides/notesSlide19.xml><?xml version="1.0" encoding="utf-8"?>
-<p:notes xmlns:a="http://schemas.openxmlformats.org/drawingml/2006/main" xmlns:r="http://schemas.openxmlformats.org/officeDocument/2006/relationships" xmlns:mc="http://schemas.openxmlformats.org/markup-compatibility/2006" xmlns:mv="urn:schemas-microsoft-com:mac:vml" xmlns:p="http://schemas.openxmlformats.org/presentationml/2006/main" xmlns:c="http://schemas.openxmlformats.org/drawingml/2006/chart" xmlns:dgm="http://schemas.openxmlformats.org/drawingml/2006/diagram" xmlns:o="urn:schemas-microsoft-com:office:office" xmlns:v="urn:schemas-microsoft-com:vml" xmlns:pvml="urn:schemas-microsoft-com:office:powerpoint" xmlns:com="http://schemas.openxmlformats.org/drawingml/2006/compatibility" xmlns:p14="http://schemas.microsoft.com/office/powerpoint/2010/main" xmlns:p15="http://schemas.microsoft.com/office/powerpoint/2012/main" xmlns:ahyp="http://schemas.microsoft.com/office/drawing/2018/hyperlinkcolor" showMasterPhAnim="0" showMasterSp="0">
-  <p:cSld>
-    <p:spTree>
-      <p:nvGrpSpPr>
-        <p:cNvPr id="266" name="Shape 266"/>
-        <p:cNvGrpSpPr/>
-        <p:nvPr/>
-      </p:nvGrpSpPr>
-      <p:grpSpPr>
-        <a:xfrm>
-          <a:off x="0" y="0"/>
-          <a:ext cx="0" cy="0"/>
-          <a:chOff x="0" y="0"/>
-          <a:chExt cx="0" cy="0"/>
-        </a:xfrm>
-      </p:grpSpPr>
-      <p:sp>
-        <p:nvSpPr>
-          <p:cNvPr id="267" name="Google Shape;267;g3c889b9f61b_0_30:notes"/>
-          <p:cNvSpPr/>
-          <p:nvPr>
-            <p:ph idx="2" type="sldImg"/>
-          </p:nvPr>
-        </p:nvSpPr>
-        <p:spPr>
-          <a:xfrm>
-            <a:off x="381300" y="685800"/>
-            <a:ext cx="6096000" cy="3429000"/>
-          </a:xfrm>
-          <a:custGeom>
-            <a:rect b="b" l="l" r="r" t="t"/>
-            <a:pathLst>
-              <a:path extrusionOk="0" h="120000" w="120000">
-                <a:moveTo>
-                  <a:pt x="0" y="0"/>
-                </a:moveTo>
-                <a:lnTo>
-                  <a:pt x="120000" y="0"/>
-                </a:lnTo>
-                <a:lnTo>
-                  <a:pt x="120000" y="120000"/>
-                </a:lnTo>
-                <a:lnTo>
-                  <a:pt x="0" y="120000"/>
-                </a:lnTo>
-                <a:close/>
-              </a:path>
-            </a:pathLst>
-          </a:custGeom>
-        </p:spPr>
-      </p:sp>
-      <p:sp>
-        <p:nvSpPr>
-          <p:cNvPr id="268" name="Google Shape;268;g3c889b9f61b_0_30:notes"/>
-          <p:cNvSpPr txBox="1"/>
-          <p:nvPr>
-            <p:ph idx="1" type="body"/>
-          </p:nvPr>
-        </p:nvSpPr>
-        <p:spPr>
-          <a:xfrm>
-            <a:off x="685800" y="4343400"/>
-            <a:ext cx="5486400" cy="4114800"/>
-          </a:xfrm>
-          <a:prstGeom prst="rect">
-            <a:avLst/>
-          </a:prstGeom>
-        </p:spPr>
-        <p:txBody>
-          <a:bodyPr anchorCtr="0" anchor="t" bIns="91425" lIns="91425" spcFirstLastPara="1" rIns="91425" wrap="square" tIns="91425">
-            <a:noAutofit/>
-          </a:bodyPr>
-          <a:lstStyle/>
-          <a:p>
-            <a:pPr indent="0" lvl="0" marL="0" rtl="0" algn="l">
-              <a:spcBef>
-                <a:spcPts val="0"/>
-              </a:spcBef>
-              <a:spcAft>
-                <a:spcPts val="0"/>
-              </a:spcAft>
-              <a:buNone/>
-            </a:pPr>
-            <a:r>
-              <a:t/>
-            </a:r>
-            <a:endParaRPr/>
-          </a:p>
-        </p:txBody>
-      </p:sp>
-    </p:spTree>
-  </p:cSld>
-  <p:clrMapOvr>
-    <a:masterClrMapping/>
-  </p:clrMapOvr>
-</p:notes>
-</file>
-
-<file path=ppt/notesSlides/notesSlide2.xml><?xml version="1.0" encoding="utf-8"?>
-<p:notes xmlns:a="http://schemas.openxmlformats.org/drawingml/2006/main" xmlns:r="http://schemas.openxmlformats.org/officeDocument/2006/relationships" xmlns:mc="http://schemas.openxmlformats.org/markup-compatibility/2006" xmlns:mv="urn:schemas-microsoft-com:mac:vml" xmlns:p="http://schemas.openxmlformats.org/presentationml/2006/main" xmlns:c="http://schemas.openxmlformats.org/drawingml/2006/chart" xmlns:dgm="http://schemas.openxmlformats.org/drawingml/2006/diagram" xmlns:o="urn:schemas-microsoft-com:office:office" xmlns:v="urn:schemas-microsoft-com:vml" xmlns:pvml="urn:schemas-microsoft-com:office:powerpoint" xmlns:com="http://schemas.openxmlformats.org/drawingml/2006/compatibility" xmlns:p14="http://schemas.microsoft.com/office/powerpoint/2010/main" xmlns:p15="http://schemas.microsoft.com/office/powerpoint/2012/main" xmlns:ahyp="http://schemas.microsoft.com/office/drawing/2018/hyperlinkcolor" showMasterPhAnim="0" showMasterSp="0">
-  <p:cSld>
-    <p:spTree>
-      <p:nvGrpSpPr>
-        <p:cNvPr id="57" name="Shape 57"/>
-        <p:cNvGrpSpPr/>
-        <p:nvPr/>
-      </p:nvGrpSpPr>
-      <p:grpSpPr>
-        <a:xfrm>
-          <a:off x="0" y="0"/>
-          <a:ext cx="0" cy="0"/>
-          <a:chOff x="0" y="0"/>
-          <a:chExt cx="0" cy="0"/>
-        </a:xfrm>
-      </p:grpSpPr>
-      <p:sp>
-        <p:nvSpPr>
-          <p:cNvPr id="58" name="Google Shape;58;g3c889b9f61b_0_25:notes"/>
-          <p:cNvSpPr/>
-          <p:nvPr>
-            <p:ph idx="2" type="sldImg"/>
-          </p:nvPr>
-        </p:nvSpPr>
-        <p:spPr>
-          <a:xfrm>
-            <a:off x="381300" y="685800"/>
-            <a:ext cx="6096000" cy="3429000"/>
-          </a:xfrm>
-          <a:custGeom>
-            <a:rect b="b" l="l" r="r" t="t"/>
-            <a:pathLst>
-              <a:path extrusionOk="0" h="120000" w="120000">
-                <a:moveTo>
-                  <a:pt x="0" y="0"/>
-                </a:moveTo>
-                <a:lnTo>
-                  <a:pt x="120000" y="0"/>
-                </a:lnTo>
-                <a:lnTo>
-                  <a:pt x="120000" y="120000"/>
-                </a:lnTo>
-                <a:lnTo>
-                  <a:pt x="0" y="120000"/>
-                </a:lnTo>
-                <a:close/>
-              </a:path>
-            </a:pathLst>
-          </a:custGeom>
-        </p:spPr>
-      </p:sp>
-      <p:sp>
-        <p:nvSpPr>
-          <p:cNvPr id="59" name="Google Shape;59;g3c889b9f61b_0_25:notes"/>
-          <p:cNvSpPr txBox="1"/>
-          <p:nvPr>
-            <p:ph idx="1" type="body"/>
-          </p:nvPr>
-        </p:nvSpPr>
-        <p:spPr>
-          <a:xfrm>
-            <a:off x="685800" y="4343400"/>
-            <a:ext cx="5486400" cy="4114800"/>
-          </a:xfrm>
-          <a:prstGeom prst="rect">
-            <a:avLst/>
-          </a:prstGeom>
-        </p:spPr>
-        <p:txBody>
-          <a:bodyPr anchorCtr="0" anchor="t" bIns="91425" lIns="91425" spcFirstLastPara="1" rIns="91425" wrap="square" tIns="91425">
-            <a:noAutofit/>
-          </a:bodyPr>
-          <a:lstStyle/>
-          <a:p>
-            <a:pPr indent="0" lvl="0" marL="0" rtl="0" algn="l">
-              <a:spcBef>
-                <a:spcPts val="0"/>
-              </a:spcBef>
-              <a:spcAft>
-                <a:spcPts val="0"/>
-              </a:spcAft>
-              <a:buNone/>
-            </a:pPr>
-            <a:r>
-              <a:t/>
-            </a:r>
-            <a:endParaRPr/>
-          </a:p>
-        </p:txBody>
-      </p:sp>
-    </p:spTree>
-  </p:cSld>
-  <p:clrMapOvr>
-    <a:masterClrMapping/>
-  </p:clrMapOvr>
-</p:notes>
-</file>
-
-<file path=ppt/notesSlides/notesSlide20.xml><?xml version="1.0" encoding="utf-8"?>
-<p:notes xmlns:a="http://schemas.openxmlformats.org/drawingml/2006/main" xmlns:r="http://schemas.openxmlformats.org/officeDocument/2006/relationships" xmlns:mc="http://schemas.openxmlformats.org/markup-compatibility/2006" xmlns:mv="urn:schemas-microsoft-com:mac:vml" xmlns:p="http://schemas.openxmlformats.org/presentationml/2006/main" xmlns:c="http://schemas.openxmlformats.org/drawingml/2006/chart" xmlns:dgm="http://schemas.openxmlformats.org/drawingml/2006/diagram" xmlns:o="urn:schemas-microsoft-com:office:office" xmlns:v="urn:schemas-microsoft-com:vml" xmlns:pvml="urn:schemas-microsoft-com:office:powerpoint" xmlns:com="http://schemas.openxmlformats.org/drawingml/2006/compatibility" xmlns:p14="http://schemas.microsoft.com/office/powerpoint/2010/main" xmlns:p15="http://schemas.microsoft.com/office/powerpoint/2012/main" xmlns:ahyp="http://schemas.microsoft.com/office/drawing/2018/hyperlinkcolor" showMasterPhAnim="0" showMasterSp="0">
-  <p:cSld>
-    <p:spTree>
-      <p:nvGrpSpPr>
-        <p:cNvPr id="272" name="Shape 272"/>
-        <p:cNvGrpSpPr/>
-        <p:nvPr/>
-      </p:nvGrpSpPr>
-      <p:grpSpPr>
-        <a:xfrm>
-          <a:off x="0" y="0"/>
-          <a:ext cx="0" cy="0"/>
-          <a:chOff x="0" y="0"/>
-          <a:chExt cx="0" cy="0"/>
-        </a:xfrm>
-      </p:grpSpPr>
-      <p:sp>
-        <p:nvSpPr>
-          <p:cNvPr id="273" name="Google Shape;273;g3c889b9f61b_1_5:notes"/>
-          <p:cNvSpPr/>
-          <p:nvPr>
-            <p:ph idx="2" type="sldImg"/>
-          </p:nvPr>
-        </p:nvSpPr>
-        <p:spPr>
-          <a:xfrm>
-            <a:off x="381300" y="685800"/>
-            <a:ext cx="6096000" cy="3429000"/>
-          </a:xfrm>
-          <a:custGeom>
-            <a:rect b="b" l="l" r="r" t="t"/>
-            <a:pathLst>
-              <a:path extrusionOk="0" h="120000" w="120000">
-                <a:moveTo>
-                  <a:pt x="0" y="0"/>
-                </a:moveTo>
-                <a:lnTo>
-                  <a:pt x="120000" y="0"/>
-                </a:lnTo>
-                <a:lnTo>
-                  <a:pt x="120000" y="120000"/>
-                </a:lnTo>
-                <a:lnTo>
-                  <a:pt x="0" y="120000"/>
-                </a:lnTo>
-                <a:close/>
-              </a:path>
-            </a:pathLst>
-          </a:custGeom>
-        </p:spPr>
-      </p:sp>
-      <p:sp>
-        <p:nvSpPr>
-          <p:cNvPr id="274" name="Google Shape;274;g3c889b9f61b_1_5:notes"/>
-          <p:cNvSpPr txBox="1"/>
-          <p:nvPr>
-            <p:ph idx="1" type="body"/>
-          </p:nvPr>
-        </p:nvSpPr>
-        <p:spPr>
-          <a:xfrm>
-            <a:off x="685800" y="4343400"/>
-            <a:ext cx="5486400" cy="4114800"/>
-          </a:xfrm>
-          <a:prstGeom prst="rect">
-            <a:avLst/>
-          </a:prstGeom>
-        </p:spPr>
-        <p:txBody>
-          <a:bodyPr anchorCtr="0" anchor="t" bIns="91425" lIns="91425" spcFirstLastPara="1" rIns="91425" wrap="square" tIns="91425">
-            <a:noAutofit/>
-          </a:bodyPr>
-          <a:lstStyle/>
-          <a:p>
-            <a:pPr indent="0" lvl="0" marL="0" rtl="0" algn="l">
-              <a:spcBef>
-                <a:spcPts val="0"/>
-              </a:spcBef>
-              <a:spcAft>
-                <a:spcPts val="0"/>
-              </a:spcAft>
-              <a:buNone/>
-            </a:pPr>
-            <a:r>
-              <a:t/>
-            </a:r>
-            <a:endParaRPr/>
-          </a:p>
-        </p:txBody>
-      </p:sp>
-    </p:spTree>
-  </p:cSld>
-  <p:clrMapOvr>
-    <a:masterClrMapping/>
-  </p:clrMapOvr>
-</p:notes>
-</file>
-
-<file path=ppt/notesSlides/notesSlide21.xml><?xml version="1.0" encoding="utf-8"?>
-<p:notes xmlns:a="http://schemas.openxmlformats.org/drawingml/2006/main" xmlns:r="http://schemas.openxmlformats.org/officeDocument/2006/relationships" xmlns:mc="http://schemas.openxmlformats.org/markup-compatibility/2006" xmlns:mv="urn:schemas-microsoft-com:mac:vml" xmlns:p="http://schemas.openxmlformats.org/presentationml/2006/main" xmlns:c="http://schemas.openxmlformats.org/drawingml/2006/chart" xmlns:dgm="http://schemas.openxmlformats.org/drawingml/2006/diagram" xmlns:o="urn:schemas-microsoft-com:office:office" xmlns:v="urn:schemas-microsoft-com:vml" xmlns:pvml="urn:schemas-microsoft-com:office:powerpoint" xmlns:com="http://schemas.openxmlformats.org/drawingml/2006/compatibility" xmlns:p14="http://schemas.microsoft.com/office/powerpoint/2010/main" xmlns:p15="http://schemas.microsoft.com/office/powerpoint/2012/main" xmlns:ahyp="http://schemas.microsoft.com/office/drawing/2018/hyperlinkcolor" showMasterPhAnim="0" showMasterSp="0">
-  <p:cSld>
-    <p:spTree>
-      <p:nvGrpSpPr>
-        <p:cNvPr id="279" name="Shape 279"/>
-        <p:cNvGrpSpPr/>
-        <p:nvPr/>
-      </p:nvGrpSpPr>
-      <p:grpSpPr>
-        <a:xfrm>
-          <a:off x="0" y="0"/>
-          <a:ext cx="0" cy="0"/>
-          <a:chOff x="0" y="0"/>
-          <a:chExt cx="0" cy="0"/>
-        </a:xfrm>
-      </p:grpSpPr>
-      <p:sp>
-        <p:nvSpPr>
-          <p:cNvPr id="280" name="Google Shape;280;g3c889b9f61b_1_14:notes"/>
-          <p:cNvSpPr/>
-          <p:nvPr>
-            <p:ph idx="2" type="sldImg"/>
-          </p:nvPr>
-        </p:nvSpPr>
-        <p:spPr>
-          <a:xfrm>
-            <a:off x="381300" y="685800"/>
-            <a:ext cx="6096000" cy="3429000"/>
-          </a:xfrm>
-          <a:custGeom>
-            <a:rect b="b" l="l" r="r" t="t"/>
-            <a:pathLst>
-              <a:path extrusionOk="0" h="120000" w="120000">
-                <a:moveTo>
-                  <a:pt x="0" y="0"/>
-                </a:moveTo>
-                <a:lnTo>
-                  <a:pt x="120000" y="0"/>
-                </a:lnTo>
-                <a:lnTo>
-                  <a:pt x="120000" y="120000"/>
-                </a:lnTo>
-                <a:lnTo>
-                  <a:pt x="0" y="120000"/>
-                </a:lnTo>
-                <a:close/>
-              </a:path>
-            </a:pathLst>
-          </a:custGeom>
-        </p:spPr>
-      </p:sp>
-      <p:sp>
-        <p:nvSpPr>
-          <p:cNvPr id="281" name="Google Shape;281;g3c889b9f61b_1_14:notes"/>
-          <p:cNvSpPr txBox="1"/>
-          <p:nvPr>
-            <p:ph idx="1" type="body"/>
-          </p:nvPr>
-        </p:nvSpPr>
-        <p:spPr>
-          <a:xfrm>
-            <a:off x="685800" y="4343400"/>
-            <a:ext cx="5486400" cy="4114800"/>
-          </a:xfrm>
-          <a:prstGeom prst="rect">
-            <a:avLst/>
-          </a:prstGeom>
-        </p:spPr>
-        <p:txBody>
-          <a:bodyPr anchorCtr="0" anchor="t" bIns="91425" lIns="91425" spcFirstLastPara="1" rIns="91425" wrap="square" tIns="91425">
-            <a:noAutofit/>
-          </a:bodyPr>
-          <a:lstStyle/>
-          <a:p>
-            <a:pPr indent="0" lvl="0" marL="0" rtl="0" algn="l">
-              <a:spcBef>
-                <a:spcPts val="0"/>
-              </a:spcBef>
-              <a:spcAft>
-                <a:spcPts val="0"/>
-              </a:spcAft>
-              <a:buNone/>
-            </a:pPr>
-            <a:r>
-              <a:t/>
-            </a:r>
-            <a:endParaRPr/>
-          </a:p>
-        </p:txBody>
-      </p:sp>
-    </p:spTree>
-  </p:cSld>
-  <p:clrMapOvr>
-    <a:masterClrMapping/>
-  </p:clrMapOvr>
-</p:notes>
-</file>
-
-<file path=ppt/notesSlides/notesSlide22.xml><?xml version="1.0" encoding="utf-8"?>
-<p:notes xmlns:a="http://schemas.openxmlformats.org/drawingml/2006/main" xmlns:r="http://schemas.openxmlformats.org/officeDocument/2006/relationships" xmlns:mc="http://schemas.openxmlformats.org/markup-compatibility/2006" xmlns:mv="urn:schemas-microsoft-com:mac:vml" xmlns:p="http://schemas.openxmlformats.org/presentationml/2006/main" xmlns:c="http://schemas.openxmlformats.org/drawingml/2006/chart" xmlns:dgm="http://schemas.openxmlformats.org/drawingml/2006/diagram" xmlns:o="urn:schemas-microsoft-com:office:office" xmlns:v="urn:schemas-microsoft-com:vml" xmlns:pvml="urn:schemas-microsoft-com:office:powerpoint" xmlns:com="http://schemas.openxmlformats.org/drawingml/2006/compatibility" xmlns:p14="http://schemas.microsoft.com/office/powerpoint/2010/main" xmlns:p15="http://schemas.microsoft.com/office/powerpoint/2012/main" xmlns:ahyp="http://schemas.microsoft.com/office/drawing/2018/hyperlinkcolor" showMasterPhAnim="0" showMasterSp="0">
-  <p:cSld>
-    <p:spTree>
-      <p:nvGrpSpPr>
-        <p:cNvPr id="287" name="Shape 287"/>
-        <p:cNvGrpSpPr/>
-        <p:nvPr/>
-      </p:nvGrpSpPr>
-      <p:grpSpPr>
-        <a:xfrm>
-          <a:off x="0" y="0"/>
-          <a:ext cx="0" cy="0"/>
-          <a:chOff x="0" y="0"/>
-          <a:chExt cx="0" cy="0"/>
-        </a:xfrm>
-      </p:grpSpPr>
-      <p:sp>
-        <p:nvSpPr>
-          <p:cNvPr id="288" name="Google Shape;288;g3c94b0d3aed_2_98:notes"/>
-          <p:cNvSpPr/>
-          <p:nvPr>
-            <p:ph idx="2" type="sldImg"/>
-          </p:nvPr>
-        </p:nvSpPr>
-        <p:spPr>
-          <a:xfrm>
-            <a:off x="381300" y="685800"/>
-            <a:ext cx="6096000" cy="3429000"/>
-          </a:xfrm>
-          <a:custGeom>
-            <a:rect b="b" l="l" r="r" t="t"/>
-            <a:pathLst>
-              <a:path extrusionOk="0" h="120000" w="120000">
-                <a:moveTo>
-                  <a:pt x="0" y="0"/>
-                </a:moveTo>
-                <a:lnTo>
-                  <a:pt x="120000" y="0"/>
-                </a:lnTo>
-                <a:lnTo>
-                  <a:pt x="120000" y="120000"/>
-                </a:lnTo>
-                <a:lnTo>
-                  <a:pt x="0" y="120000"/>
-                </a:lnTo>
-                <a:close/>
-              </a:path>
-            </a:pathLst>
-          </a:custGeom>
-        </p:spPr>
-      </p:sp>
-      <p:sp>
-        <p:nvSpPr>
-          <p:cNvPr id="289" name="Google Shape;289;g3c94b0d3aed_2_98:notes"/>
-          <p:cNvSpPr txBox="1"/>
-          <p:nvPr>
-            <p:ph idx="1" type="body"/>
-          </p:nvPr>
-        </p:nvSpPr>
-        <p:spPr>
-          <a:xfrm>
-            <a:off x="685800" y="4343400"/>
-            <a:ext cx="5486400" cy="4114800"/>
-          </a:xfrm>
-          <a:prstGeom prst="rect">
-            <a:avLst/>
-          </a:prstGeom>
-        </p:spPr>
-        <p:txBody>
-          <a:bodyPr anchorCtr="0" anchor="t" bIns="91425" lIns="91425" spcFirstLastPara="1" rIns="91425" wrap="square" tIns="91425">
-            <a:noAutofit/>
-          </a:bodyPr>
-          <a:lstStyle/>
-          <a:p>
-            <a:pPr indent="0" lvl="0" marL="0" rtl="0" algn="l">
-              <a:spcBef>
-                <a:spcPts val="0"/>
-              </a:spcBef>
-              <a:spcAft>
-                <a:spcPts val="0"/>
-              </a:spcAft>
-              <a:buNone/>
-            </a:pPr>
-            <a:r>
-              <a:t/>
-            </a:r>
-            <a:endParaRPr/>
-          </a:p>
-        </p:txBody>
-      </p:sp>
-    </p:spTree>
-  </p:cSld>
-  <p:clrMapOvr>
-    <a:masterClrMapping/>
-  </p:clrMapOvr>
-</p:notes>
-</file>
-
-<file path=ppt/notesSlides/notesSlide23.xml><?xml version="1.0" encoding="utf-8"?>
-<p:notes xmlns:a="http://schemas.openxmlformats.org/drawingml/2006/main" xmlns:r="http://schemas.openxmlformats.org/officeDocument/2006/relationships" xmlns:mc="http://schemas.openxmlformats.org/markup-compatibility/2006" xmlns:mv="urn:schemas-microsoft-com:mac:vml" xmlns:p="http://schemas.openxmlformats.org/presentationml/2006/main" xmlns:c="http://schemas.openxmlformats.org/drawingml/2006/chart" xmlns:dgm="http://schemas.openxmlformats.org/drawingml/2006/diagram" xmlns:o="urn:schemas-microsoft-com:office:office" xmlns:v="urn:schemas-microsoft-com:vml" xmlns:pvml="urn:schemas-microsoft-com:office:powerpoint" xmlns:com="http://schemas.openxmlformats.org/drawingml/2006/compatibility" xmlns:p14="http://schemas.microsoft.com/office/powerpoint/2010/main" xmlns:p15="http://schemas.microsoft.com/office/powerpoint/2012/main" xmlns:ahyp="http://schemas.microsoft.com/office/drawing/2018/hyperlinkcolor" showMasterPhAnim="0" showMasterSp="0">
-  <p:cSld>
-    <p:spTree>
-      <p:nvGrpSpPr>
-        <p:cNvPr id="293" name="Shape 293"/>
-        <p:cNvGrpSpPr/>
-        <p:nvPr/>
-      </p:nvGrpSpPr>
-      <p:grpSpPr>
-        <a:xfrm>
-          <a:off x="0" y="0"/>
-          <a:ext cx="0" cy="0"/>
-          <a:chOff x="0" y="0"/>
-          <a:chExt cx="0" cy="0"/>
-        </a:xfrm>
-      </p:grpSpPr>
-      <p:sp>
-        <p:nvSpPr>
-          <p:cNvPr id="294" name="Google Shape;294;g3c889b9f61b_0_57:notes"/>
-          <p:cNvSpPr/>
-          <p:nvPr>
-            <p:ph idx="2" type="sldImg"/>
-          </p:nvPr>
-        </p:nvSpPr>
-        <p:spPr>
-          <a:xfrm>
-            <a:off x="381300" y="685800"/>
-            <a:ext cx="6096000" cy="3429000"/>
-          </a:xfrm>
-          <a:custGeom>
-            <a:rect b="b" l="l" r="r" t="t"/>
-            <a:pathLst>
-              <a:path extrusionOk="0" h="120000" w="120000">
-                <a:moveTo>
-                  <a:pt x="0" y="0"/>
-                </a:moveTo>
-                <a:lnTo>
-                  <a:pt x="120000" y="0"/>
-                </a:lnTo>
-                <a:lnTo>
-                  <a:pt x="120000" y="120000"/>
-                </a:lnTo>
-                <a:lnTo>
-                  <a:pt x="0" y="120000"/>
-                </a:lnTo>
-                <a:close/>
-              </a:path>
-            </a:pathLst>
-          </a:custGeom>
-        </p:spPr>
-      </p:sp>
-      <p:sp>
-        <p:nvSpPr>
-          <p:cNvPr id="295" name="Google Shape;295;g3c889b9f61b_0_57:notes"/>
-          <p:cNvSpPr txBox="1"/>
-          <p:nvPr>
-            <p:ph idx="1" type="body"/>
-          </p:nvPr>
-        </p:nvSpPr>
-        <p:spPr>
-          <a:xfrm>
-            <a:off x="685800" y="4343400"/>
-            <a:ext cx="5486400" cy="4114800"/>
-          </a:xfrm>
-          <a:prstGeom prst="rect">
-            <a:avLst/>
-          </a:prstGeom>
-        </p:spPr>
-        <p:txBody>
-          <a:bodyPr anchorCtr="0" anchor="t" bIns="91425" lIns="91425" spcFirstLastPara="1" rIns="91425" wrap="square" tIns="91425">
-            <a:noAutofit/>
-          </a:bodyPr>
-          <a:lstStyle/>
-          <a:p>
-            <a:pPr indent="0" lvl="0" marL="0" rtl="0" algn="l">
-              <a:spcBef>
-                <a:spcPts val="0"/>
-              </a:spcBef>
-              <a:spcAft>
-                <a:spcPts val="0"/>
-              </a:spcAft>
-              <a:buNone/>
-            </a:pPr>
-            <a:r>
-              <a:t/>
-            </a:r>
-            <a:endParaRPr/>
-          </a:p>
-        </p:txBody>
-      </p:sp>
-    </p:spTree>
-  </p:cSld>
-  <p:clrMapOvr>
-    <a:masterClrMapping/>
-  </p:clrMapOvr>
-</p:notes>
-</file>
-
-<file path=ppt/notesSlides/notesSlide24.xml><?xml version="1.0" encoding="utf-8"?>
-<p:notes xmlns:a="http://schemas.openxmlformats.org/drawingml/2006/main" xmlns:r="http://schemas.openxmlformats.org/officeDocument/2006/relationships" xmlns:mc="http://schemas.openxmlformats.org/markup-compatibility/2006" xmlns:mv="urn:schemas-microsoft-com:mac:vml" xmlns:p="http://schemas.openxmlformats.org/presentationml/2006/main" xmlns:c="http://schemas.openxmlformats.org/drawingml/2006/chart" xmlns:dgm="http://schemas.openxmlformats.org/drawingml/2006/diagram" xmlns:o="urn:schemas-microsoft-com:office:office" xmlns:v="urn:schemas-microsoft-com:vml" xmlns:pvml="urn:schemas-microsoft-com:office:powerpoint" xmlns:com="http://schemas.openxmlformats.org/drawingml/2006/compatibility" xmlns:p14="http://schemas.microsoft.com/office/powerpoint/2010/main" xmlns:p15="http://schemas.microsoft.com/office/powerpoint/2012/main" xmlns:ahyp="http://schemas.microsoft.com/office/drawing/2018/hyperlinkcolor" showMasterPhAnim="0" showMasterSp="0">
-  <p:cSld>
-    <p:spTree>
-      <p:nvGrpSpPr>
-        <p:cNvPr id="299" name="Shape 299"/>
-        <p:cNvGrpSpPr/>
-        <p:nvPr/>
-      </p:nvGrpSpPr>
-      <p:grpSpPr>
-        <a:xfrm>
-          <a:off x="0" y="0"/>
-          <a:ext cx="0" cy="0"/>
-          <a:chOff x="0" y="0"/>
-          <a:chExt cx="0" cy="0"/>
-        </a:xfrm>
-      </p:grpSpPr>
-      <p:sp>
-        <p:nvSpPr>
-          <p:cNvPr id="300" name="Google Shape;300;g3c889b9f61b_0_35:notes"/>
-          <p:cNvSpPr/>
-          <p:nvPr>
-            <p:ph idx="2" type="sldImg"/>
-          </p:nvPr>
-        </p:nvSpPr>
-        <p:spPr>
-          <a:xfrm>
-            <a:off x="381300" y="685800"/>
-            <a:ext cx="6096000" cy="3429000"/>
-          </a:xfrm>
-          <a:custGeom>
-            <a:rect b="b" l="l" r="r" t="t"/>
-            <a:pathLst>
-              <a:path extrusionOk="0" h="120000" w="120000">
-                <a:moveTo>
-                  <a:pt x="0" y="0"/>
-                </a:moveTo>
-                <a:lnTo>
-                  <a:pt x="120000" y="0"/>
-                </a:lnTo>
-                <a:lnTo>
-                  <a:pt x="120000" y="120000"/>
-                </a:lnTo>
-                <a:lnTo>
-                  <a:pt x="0" y="120000"/>
-                </a:lnTo>
-                <a:close/>
-              </a:path>
-            </a:pathLst>
-          </a:custGeom>
-        </p:spPr>
-      </p:sp>
-      <p:sp>
-        <p:nvSpPr>
-          <p:cNvPr id="301" name="Google Shape;301;g3c889b9f61b_0_35:notes"/>
-          <p:cNvSpPr txBox="1"/>
-          <p:nvPr>
-            <p:ph idx="1" type="body"/>
-          </p:nvPr>
-        </p:nvSpPr>
-        <p:spPr>
-          <a:xfrm>
-            <a:off x="685800" y="4343400"/>
-            <a:ext cx="5486400" cy="4114800"/>
-          </a:xfrm>
-          <a:prstGeom prst="rect">
-            <a:avLst/>
-          </a:prstGeom>
-        </p:spPr>
-        <p:txBody>
-          <a:bodyPr anchorCtr="0" anchor="t" bIns="91425" lIns="91425" spcFirstLastPara="1" rIns="91425" wrap="square" tIns="91425">
-            <a:noAutofit/>
-          </a:bodyPr>
-          <a:lstStyle/>
-          <a:p>
-            <a:pPr indent="0" lvl="0" marL="0" rtl="0" algn="l">
-              <a:spcBef>
-                <a:spcPts val="0"/>
-              </a:spcBef>
-              <a:spcAft>
-                <a:spcPts val="0"/>
-              </a:spcAft>
-              <a:buNone/>
-            </a:pPr>
-            <a:r>
-              <a:t/>
-            </a:r>
-            <a:endParaRPr/>
-          </a:p>
-        </p:txBody>
-      </p:sp>
-    </p:spTree>
-  </p:cSld>
-  <p:clrMapOvr>
-    <a:masterClrMapping/>
-  </p:clrMapOvr>
-</p:notes>
-</file>
-
-<file path=ppt/notesSlides/notesSlide25.xml><?xml version="1.0" encoding="utf-8"?>
-<p:notes xmlns:a="http://schemas.openxmlformats.org/drawingml/2006/main" xmlns:r="http://schemas.openxmlformats.org/officeDocument/2006/relationships" xmlns:mc="http://schemas.openxmlformats.org/markup-compatibility/2006" xmlns:mv="urn:schemas-microsoft-com:mac:vml" xmlns:p="http://schemas.openxmlformats.org/presentationml/2006/main" xmlns:c="http://schemas.openxmlformats.org/drawingml/2006/chart" xmlns:dgm="http://schemas.openxmlformats.org/drawingml/2006/diagram" xmlns:o="urn:schemas-microsoft-com:office:office" xmlns:v="urn:schemas-microsoft-com:vml" xmlns:pvml="urn:schemas-microsoft-com:office:powerpoint" xmlns:com="http://schemas.openxmlformats.org/drawingml/2006/compatibility" xmlns:p14="http://schemas.microsoft.com/office/powerpoint/2010/main" xmlns:p15="http://schemas.microsoft.com/office/powerpoint/2012/main" xmlns:ahyp="http://schemas.microsoft.com/office/drawing/2018/hyperlinkcolor" showMasterPhAnim="0" showMasterSp="0">
-  <p:cSld>
-    <p:spTree>
-      <p:nvGrpSpPr>
-        <p:cNvPr id="305" name="Shape 305"/>
-        <p:cNvGrpSpPr/>
-        <p:nvPr/>
-      </p:nvGrpSpPr>
-      <p:grpSpPr>
-        <a:xfrm>
-          <a:off x="0" y="0"/>
-          <a:ext cx="0" cy="0"/>
-          <a:chOff x="0" y="0"/>
-          <a:chExt cx="0" cy="0"/>
-        </a:xfrm>
-      </p:grpSpPr>
-      <p:sp>
-        <p:nvSpPr>
-          <p:cNvPr id="306" name="Google Shape;306;g3c889b9f61b_0_65:notes"/>
-          <p:cNvSpPr/>
-          <p:nvPr>
-            <p:ph idx="2" type="sldImg"/>
-          </p:nvPr>
-        </p:nvSpPr>
-        <p:spPr>
-          <a:xfrm>
-            <a:off x="381300" y="685800"/>
-            <a:ext cx="6096000" cy="3429000"/>
-          </a:xfrm>
-          <a:custGeom>
-            <a:rect b="b" l="l" r="r" t="t"/>
-            <a:pathLst>
-              <a:path extrusionOk="0" h="120000" w="120000">
-                <a:moveTo>
-                  <a:pt x="0" y="0"/>
-                </a:moveTo>
-                <a:lnTo>
-                  <a:pt x="120000" y="0"/>
-                </a:lnTo>
-                <a:lnTo>
-                  <a:pt x="120000" y="120000"/>
-                </a:lnTo>
-                <a:lnTo>
-                  <a:pt x="0" y="120000"/>
-                </a:lnTo>
-                <a:close/>
-              </a:path>
-            </a:pathLst>
-          </a:custGeom>
-        </p:spPr>
-      </p:sp>
-      <p:sp>
-        <p:nvSpPr>
-          <p:cNvPr id="307" name="Google Shape;307;g3c889b9f61b_0_65:notes"/>
-          <p:cNvSpPr txBox="1"/>
-          <p:nvPr>
-            <p:ph idx="1" type="body"/>
-          </p:nvPr>
-        </p:nvSpPr>
-        <p:spPr>
-          <a:xfrm>
-            <a:off x="685800" y="4343400"/>
-            <a:ext cx="5486400" cy="4114800"/>
-          </a:xfrm>
-          <a:prstGeom prst="rect">
-            <a:avLst/>
-          </a:prstGeom>
-        </p:spPr>
-        <p:txBody>
-          <a:bodyPr anchorCtr="0" anchor="t" bIns="91425" lIns="91425" spcFirstLastPara="1" rIns="91425" wrap="square" tIns="91425">
-            <a:noAutofit/>
-          </a:bodyPr>
-          <a:lstStyle/>
-          <a:p>
-            <a:pPr indent="0" lvl="0" marL="0" rtl="0" algn="l">
-              <a:spcBef>
-                <a:spcPts val="0"/>
-              </a:spcBef>
-              <a:spcAft>
-                <a:spcPts val="0"/>
-              </a:spcAft>
-              <a:buNone/>
-            </a:pPr>
-            <a:r>
-              <a:t/>
-            </a:r>
-            <a:endParaRPr/>
-          </a:p>
-        </p:txBody>
-      </p:sp>
-    </p:spTree>
-  </p:cSld>
-  <p:clrMapOvr>
-    <a:masterClrMapping/>
-  </p:clrMapOvr>
-</p:notes>
-</file>
-
-<file path=ppt/notesSlides/notesSlide26.xml><?xml version="1.0" encoding="utf-8"?>
-<p:notes xmlns:a="http://schemas.openxmlformats.org/drawingml/2006/main" xmlns:r="http://schemas.openxmlformats.org/officeDocument/2006/relationships" xmlns:mc="http://schemas.openxmlformats.org/markup-compatibility/2006" xmlns:mv="urn:schemas-microsoft-com:mac:vml" xmlns:p="http://schemas.openxmlformats.org/presentationml/2006/main" xmlns:c="http://schemas.openxmlformats.org/drawingml/2006/chart" xmlns:dgm="http://schemas.openxmlformats.org/drawingml/2006/diagram" xmlns:o="urn:schemas-microsoft-com:office:office" xmlns:v="urn:schemas-microsoft-com:vml" xmlns:pvml="urn:schemas-microsoft-com:office:powerpoint" xmlns:com="http://schemas.openxmlformats.org/drawingml/2006/compatibility" xmlns:p14="http://schemas.microsoft.com/office/powerpoint/2010/main" xmlns:p15="http://schemas.microsoft.com/office/powerpoint/2012/main" xmlns:ahyp="http://schemas.microsoft.com/office/drawing/2018/hyperlinkcolor" showMasterPhAnim="0" showMasterSp="0">
-  <p:cSld>
-    <p:spTree>
-      <p:nvGrpSpPr>
-        <p:cNvPr id="311" name="Shape 311"/>
-        <p:cNvGrpSpPr/>
-        <p:nvPr/>
-      </p:nvGrpSpPr>
-      <p:grpSpPr>
-        <a:xfrm>
-          <a:off x="0" y="0"/>
-          <a:ext cx="0" cy="0"/>
-          <a:chOff x="0" y="0"/>
-          <a:chExt cx="0" cy="0"/>
-        </a:xfrm>
-      </p:grpSpPr>
-      <p:sp>
-        <p:nvSpPr>
-          <p:cNvPr id="312" name="Google Shape;312;g3c889b9f61b_0_52:notes"/>
-          <p:cNvSpPr/>
-          <p:nvPr>
-            <p:ph idx="2" type="sldImg"/>
-          </p:nvPr>
-        </p:nvSpPr>
-        <p:spPr>
-          <a:xfrm>
-            <a:off x="381300" y="685800"/>
-            <a:ext cx="6096000" cy="3429000"/>
-          </a:xfrm>
-          <a:custGeom>
-            <a:rect b="b" l="l" r="r" t="t"/>
-            <a:pathLst>
-              <a:path extrusionOk="0" h="120000" w="120000">
-                <a:moveTo>
-                  <a:pt x="0" y="0"/>
-                </a:moveTo>
-                <a:lnTo>
-                  <a:pt x="120000" y="0"/>
-                </a:lnTo>
-                <a:lnTo>
-                  <a:pt x="120000" y="120000"/>
-                </a:lnTo>
-                <a:lnTo>
-                  <a:pt x="0" y="120000"/>
-                </a:lnTo>
-                <a:close/>
-              </a:path>
-            </a:pathLst>
-          </a:custGeom>
-        </p:spPr>
-      </p:sp>
-      <p:sp>
-        <p:nvSpPr>
-          <p:cNvPr id="313" name="Google Shape;313;g3c889b9f61b_0_52:notes"/>
-          <p:cNvSpPr txBox="1"/>
-          <p:nvPr>
-            <p:ph idx="1" type="body"/>
-          </p:nvPr>
-        </p:nvSpPr>
-        <p:spPr>
-          <a:xfrm>
-            <a:off x="685800" y="4343400"/>
-            <a:ext cx="5486400" cy="4114800"/>
-          </a:xfrm>
-          <a:prstGeom prst="rect">
-            <a:avLst/>
-          </a:prstGeom>
-        </p:spPr>
-        <p:txBody>
-          <a:bodyPr anchorCtr="0" anchor="t" bIns="91425" lIns="91425" spcFirstLastPara="1" rIns="91425" wrap="square" tIns="91425">
-            <a:noAutofit/>
-          </a:bodyPr>
-          <a:lstStyle/>
-          <a:p>
-            <a:pPr indent="0" lvl="0" marL="0" rtl="0" algn="l">
-              <a:spcBef>
-                <a:spcPts val="0"/>
-              </a:spcBef>
-              <a:spcAft>
-                <a:spcPts val="0"/>
-              </a:spcAft>
-              <a:buNone/>
-            </a:pPr>
-            <a:r>
-              <a:t/>
-            </a:r>
-            <a:endParaRPr/>
-          </a:p>
-        </p:txBody>
-      </p:sp>
-    </p:spTree>
-  </p:cSld>
-  <p:clrMapOvr>
-    <a:masterClrMapping/>
-  </p:clrMapOvr>
-</p:notes>
-</file>
-
-<file path=ppt/notesSlides/notesSlide27.xml><?xml version="1.0" encoding="utf-8"?>
-<p:notes xmlns:a="http://schemas.openxmlformats.org/drawingml/2006/main" xmlns:r="http://schemas.openxmlformats.org/officeDocument/2006/relationships" xmlns:mc="http://schemas.openxmlformats.org/markup-compatibility/2006" xmlns:mv="urn:schemas-microsoft-com:mac:vml" xmlns:p="http://schemas.openxmlformats.org/presentationml/2006/main" xmlns:c="http://schemas.openxmlformats.org/drawingml/2006/chart" xmlns:dgm="http://schemas.openxmlformats.org/drawingml/2006/diagram" xmlns:o="urn:schemas-microsoft-com:office:office" xmlns:v="urn:schemas-microsoft-com:vml" xmlns:pvml="urn:schemas-microsoft-com:office:powerpoint" xmlns:com="http://schemas.openxmlformats.org/drawingml/2006/compatibility" xmlns:p14="http://schemas.microsoft.com/office/powerpoint/2010/main" xmlns:p15="http://schemas.microsoft.com/office/powerpoint/2012/main" xmlns:ahyp="http://schemas.microsoft.com/office/drawing/2018/hyperlinkcolor" showMasterPhAnim="0" showMasterSp="0">
-  <p:cSld>
-    <p:spTree>
-      <p:nvGrpSpPr>
-        <p:cNvPr id="319" name="Shape 319"/>
-        <p:cNvGrpSpPr/>
-        <p:nvPr/>
-      </p:nvGrpSpPr>
-      <p:grpSpPr>
-        <a:xfrm>
-          <a:off x="0" y="0"/>
-          <a:ext cx="0" cy="0"/>
-          <a:chOff x="0" y="0"/>
-          <a:chExt cx="0" cy="0"/>
-        </a:xfrm>
-      </p:grpSpPr>
-      <p:sp>
-        <p:nvSpPr>
-          <p:cNvPr id="320" name="Google Shape;320;g3c94b0d3aed_2_55:notes"/>
-          <p:cNvSpPr/>
-          <p:nvPr>
-            <p:ph idx="2" type="sldImg"/>
-          </p:nvPr>
-        </p:nvSpPr>
-        <p:spPr>
-          <a:xfrm>
-            <a:off x="381300" y="685800"/>
-            <a:ext cx="6096000" cy="3429000"/>
-          </a:xfrm>
-          <a:custGeom>
-            <a:rect b="b" l="l" r="r" t="t"/>
-            <a:pathLst>
-              <a:path extrusionOk="0" h="120000" w="120000">
-                <a:moveTo>
-                  <a:pt x="0" y="0"/>
-                </a:moveTo>
-                <a:lnTo>
-                  <a:pt x="120000" y="0"/>
-                </a:lnTo>
-                <a:lnTo>
-                  <a:pt x="120000" y="120000"/>
-                </a:lnTo>
-                <a:lnTo>
-                  <a:pt x="0" y="120000"/>
-                </a:lnTo>
-                <a:close/>
-              </a:path>
-            </a:pathLst>
-          </a:custGeom>
-        </p:spPr>
-      </p:sp>
-      <p:sp>
-        <p:nvSpPr>
-          <p:cNvPr id="321" name="Google Shape;321;g3c94b0d3aed_2_55:notes"/>
-          <p:cNvSpPr txBox="1"/>
-          <p:nvPr>
-            <p:ph idx="1" type="body"/>
-          </p:nvPr>
-        </p:nvSpPr>
-        <p:spPr>
-          <a:xfrm>
-            <a:off x="685800" y="4343400"/>
-            <a:ext cx="5486400" cy="4114800"/>
-          </a:xfrm>
-          <a:prstGeom prst="rect">
-            <a:avLst/>
-          </a:prstGeom>
-        </p:spPr>
-        <p:txBody>
-          <a:bodyPr anchorCtr="0" anchor="t" bIns="91425" lIns="91425" spcFirstLastPara="1" rIns="91425" wrap="square" tIns="91425">
-            <a:noAutofit/>
-          </a:bodyPr>
-          <a:lstStyle/>
-          <a:p>
-            <a:pPr indent="0" lvl="0" marL="0" rtl="0" algn="l">
-              <a:spcBef>
-                <a:spcPts val="0"/>
-              </a:spcBef>
-              <a:spcAft>
-                <a:spcPts val="0"/>
-              </a:spcAft>
-              <a:buNone/>
-            </a:pPr>
-            <a:r>
-              <a:t/>
-            </a:r>
-            <a:endParaRPr/>
-          </a:p>
-        </p:txBody>
-      </p:sp>
-    </p:spTree>
-  </p:cSld>
-  <p:clrMapOvr>
-    <a:masterClrMapping/>
-  </p:clrMapOvr>
-</p:notes>
-</file>
-
-<file path=ppt/notesSlides/notesSlide28.xml><?xml version="1.0" encoding="utf-8"?>
-<p:notes xmlns:a="http://schemas.openxmlformats.org/drawingml/2006/main" xmlns:r="http://schemas.openxmlformats.org/officeDocument/2006/relationships" xmlns:mc="http://schemas.openxmlformats.org/markup-compatibility/2006" xmlns:mv="urn:schemas-microsoft-com:mac:vml" xmlns:p="http://schemas.openxmlformats.org/presentationml/2006/main" xmlns:c="http://schemas.openxmlformats.org/drawingml/2006/chart" xmlns:dgm="http://schemas.openxmlformats.org/drawingml/2006/diagram" xmlns:o="urn:schemas-microsoft-com:office:office" xmlns:v="urn:schemas-microsoft-com:vml" xmlns:pvml="urn:schemas-microsoft-com:office:powerpoint" xmlns:com="http://schemas.openxmlformats.org/drawingml/2006/compatibility" xmlns:p14="http://schemas.microsoft.com/office/powerpoint/2010/main" xmlns:p15="http://schemas.microsoft.com/office/powerpoint/2012/main" xmlns:ahyp="http://schemas.microsoft.com/office/drawing/2018/hyperlinkcolor" showMasterPhAnim="0" showMasterSp="0">
-  <p:cSld>
-    <p:spTree>
-      <p:nvGrpSpPr>
-        <p:cNvPr id="327" name="Shape 327"/>
-        <p:cNvGrpSpPr/>
-        <p:nvPr/>
-      </p:nvGrpSpPr>
-      <p:grpSpPr>
-        <a:xfrm>
-          <a:off x="0" y="0"/>
-          <a:ext cx="0" cy="0"/>
-          <a:chOff x="0" y="0"/>
-          <a:chExt cx="0" cy="0"/>
-        </a:xfrm>
-      </p:grpSpPr>
-      <p:sp>
-        <p:nvSpPr>
-          <p:cNvPr id="328" name="Google Shape;328;g3c94b0d3aed_2_85:notes"/>
-          <p:cNvSpPr/>
-          <p:nvPr>
-            <p:ph idx="2" type="sldImg"/>
-          </p:nvPr>
-        </p:nvSpPr>
-        <p:spPr>
-          <a:xfrm>
-            <a:off x="381300" y="685800"/>
-            <a:ext cx="6096000" cy="3429000"/>
-          </a:xfrm>
-          <a:custGeom>
-            <a:rect b="b" l="l" r="r" t="t"/>
-            <a:pathLst>
-              <a:path extrusionOk="0" h="120000" w="120000">
-                <a:moveTo>
-                  <a:pt x="0" y="0"/>
-                </a:moveTo>
-                <a:lnTo>
-                  <a:pt x="120000" y="0"/>
-                </a:lnTo>
-                <a:lnTo>
-                  <a:pt x="120000" y="120000"/>
-                </a:lnTo>
-                <a:lnTo>
-                  <a:pt x="0" y="120000"/>
-                </a:lnTo>
-                <a:close/>
-              </a:path>
-            </a:pathLst>
-          </a:custGeom>
-        </p:spPr>
-      </p:sp>
-      <p:sp>
-        <p:nvSpPr>
-          <p:cNvPr id="329" name="Google Shape;329;g3c94b0d3aed_2_85:notes"/>
-          <p:cNvSpPr txBox="1"/>
-          <p:nvPr>
-            <p:ph idx="1" type="body"/>
-          </p:nvPr>
-        </p:nvSpPr>
-        <p:spPr>
-          <a:xfrm>
-            <a:off x="685800" y="4343400"/>
-            <a:ext cx="5486400" cy="4114800"/>
-          </a:xfrm>
-          <a:prstGeom prst="rect">
-            <a:avLst/>
-          </a:prstGeom>
-        </p:spPr>
-        <p:txBody>
-          <a:bodyPr anchorCtr="0" anchor="t" bIns="91425" lIns="91425" spcFirstLastPara="1" rIns="91425" wrap="square" tIns="91425">
-            <a:noAutofit/>
-          </a:bodyPr>
-          <a:lstStyle/>
-          <a:p>
-            <a:pPr indent="0" lvl="0" marL="0" rtl="0" algn="l">
-              <a:spcBef>
-                <a:spcPts val="0"/>
-              </a:spcBef>
-              <a:spcAft>
-                <a:spcPts val="0"/>
-              </a:spcAft>
-              <a:buNone/>
-            </a:pPr>
-            <a:r>
-              <a:t/>
-            </a:r>
-            <a:endParaRPr/>
-          </a:p>
-        </p:txBody>
-      </p:sp>
-    </p:spTree>
-  </p:cSld>
-  <p:clrMapOvr>
-    <a:masterClrMapping/>
-  </p:clrMapOvr>
-</p:notes>
-</file>
-
-<file path=ppt/notesSlides/notesSlide29.xml><?xml version="1.0" encoding="utf-8"?>
-<p:notes xmlns:a="http://schemas.openxmlformats.org/drawingml/2006/main" xmlns:r="http://schemas.openxmlformats.org/officeDocument/2006/relationships" xmlns:mc="http://schemas.openxmlformats.org/markup-compatibility/2006" xmlns:mv="urn:schemas-microsoft-com:mac:vml" xmlns:p="http://schemas.openxmlformats.org/presentationml/2006/main" xmlns:c="http://schemas.openxmlformats.org/drawingml/2006/chart" xmlns:dgm="http://schemas.openxmlformats.org/drawingml/2006/diagram" xmlns:o="urn:schemas-microsoft-com:office:office" xmlns:v="urn:schemas-microsoft-com:vml" xmlns:pvml="urn:schemas-microsoft-com:office:powerpoint" xmlns:com="http://schemas.openxmlformats.org/drawingml/2006/compatibility" xmlns:p14="http://schemas.microsoft.com/office/powerpoint/2010/main" xmlns:p15="http://schemas.microsoft.com/office/powerpoint/2012/main" xmlns:ahyp="http://schemas.microsoft.com/office/drawing/2018/hyperlinkcolor" showMasterPhAnim="0" showMasterSp="0">
-  <p:cSld>
-    <p:spTree>
-      <p:nvGrpSpPr>
-        <p:cNvPr id="333" name="Shape 333"/>
-        <p:cNvGrpSpPr/>
-        <p:nvPr/>
-      </p:nvGrpSpPr>
-      <p:grpSpPr>
-        <a:xfrm>
-          <a:off x="0" y="0"/>
-          <a:ext cx="0" cy="0"/>
-          <a:chOff x="0" y="0"/>
-          <a:chExt cx="0" cy="0"/>
-        </a:xfrm>
-      </p:grpSpPr>
-      <p:sp>
-        <p:nvSpPr>
-          <p:cNvPr id="334" name="Google Shape;334;g3c94b0d3aed_2_90:notes"/>
-          <p:cNvSpPr/>
-          <p:nvPr>
-            <p:ph idx="2" type="sldImg"/>
-          </p:nvPr>
-        </p:nvSpPr>
-        <p:spPr>
-          <a:xfrm>
-            <a:off x="381300" y="685800"/>
-            <a:ext cx="6096000" cy="3429000"/>
-          </a:xfrm>
-          <a:custGeom>
-            <a:rect b="b" l="l" r="r" t="t"/>
-            <a:pathLst>
-              <a:path extrusionOk="0" h="120000" w="120000">
-                <a:moveTo>
-                  <a:pt x="0" y="0"/>
-                </a:moveTo>
-                <a:lnTo>
-                  <a:pt x="120000" y="0"/>
-                </a:lnTo>
-                <a:lnTo>
-                  <a:pt x="120000" y="120000"/>
-                </a:lnTo>
-                <a:lnTo>
-                  <a:pt x="0" y="120000"/>
-                </a:lnTo>
-                <a:close/>
-              </a:path>
-            </a:pathLst>
-          </a:custGeom>
-        </p:spPr>
-      </p:sp>
-      <p:sp>
-        <p:nvSpPr>
-          <p:cNvPr id="335" name="Google Shape;335;g3c94b0d3aed_2_90:notes"/>
-          <p:cNvSpPr txBox="1"/>
-          <p:nvPr>
-            <p:ph idx="1" type="body"/>
-          </p:nvPr>
-        </p:nvSpPr>
-        <p:spPr>
-          <a:xfrm>
-            <a:off x="685800" y="4343400"/>
-            <a:ext cx="5486400" cy="4114800"/>
-          </a:xfrm>
-          <a:prstGeom prst="rect">
-            <a:avLst/>
-          </a:prstGeom>
-        </p:spPr>
-        <p:txBody>
-          <a:bodyPr anchorCtr="0" anchor="t" bIns="91425" lIns="91425" spcFirstLastPara="1" rIns="91425" wrap="square" tIns="91425">
-            <a:noAutofit/>
-          </a:bodyPr>
-          <a:lstStyle/>
-          <a:p>
-            <a:pPr indent="0" lvl="0" marL="0" rtl="0" algn="l">
-              <a:spcBef>
-                <a:spcPts val="0"/>
-              </a:spcBef>
-              <a:spcAft>
-                <a:spcPts val="0"/>
-              </a:spcAft>
-              <a:buNone/>
-            </a:pPr>
-            <a:r>
-              <a:t/>
-            </a:r>
-            <a:endParaRPr/>
-          </a:p>
-        </p:txBody>
-      </p:sp>
-    </p:spTree>
-  </p:cSld>
-  <p:clrMapOvr>
-    <a:masterClrMapping/>
-  </p:clrMapOvr>
-</p:notes>
-</file>
-
-<file path=ppt/notesSlides/notesSlide3.xml><?xml version="1.0" encoding="utf-8"?>
-<p:notes xmlns:a="http://schemas.openxmlformats.org/drawingml/2006/main" xmlns:r="http://schemas.openxmlformats.org/officeDocument/2006/relationships" xmlns:mc="http://schemas.openxmlformats.org/markup-compatibility/2006" xmlns:mv="urn:schemas-microsoft-com:mac:vml" xmlns:p="http://schemas.openxmlformats.org/presentationml/2006/main" xmlns:c="http://schemas.openxmlformats.org/drawingml/2006/chart" xmlns:dgm="http://schemas.openxmlformats.org/drawingml/2006/diagram" xmlns:o="urn:schemas-microsoft-com:office:office" xmlns:v="urn:schemas-microsoft-com:vml" xmlns:pvml="urn:schemas-microsoft-com:office:powerpoint" xmlns:com="http://schemas.openxmlformats.org/drawingml/2006/compatibility" xmlns:p14="http://schemas.microsoft.com/office/powerpoint/2010/main" xmlns:p15="http://schemas.microsoft.com/office/powerpoint/2012/main" xmlns:ahyp="http://schemas.microsoft.com/office/drawing/2018/hyperlinkcolor" showMasterPhAnim="0" showMasterSp="0">
-  <p:cSld>
-    <p:spTree>
-      <p:nvGrpSpPr>
-        <p:cNvPr id="63" name="Shape 63"/>
-        <p:cNvGrpSpPr/>
-        <p:nvPr/>
-      </p:nvGrpSpPr>
-      <p:grpSpPr>
-        <a:xfrm>
-          <a:off x="0" y="0"/>
-          <a:ext cx="0" cy="0"/>
-          <a:chOff x="0" y="0"/>
-          <a:chExt cx="0" cy="0"/>
-        </a:xfrm>
-      </p:grpSpPr>
-      <p:sp>
-        <p:nvSpPr>
-          <p:cNvPr id="64" name="Google Shape;64;g3c94b0d3aed_3_335:notes"/>
-          <p:cNvSpPr/>
-          <p:nvPr>
-            <p:ph idx="2" type="sldImg"/>
-          </p:nvPr>
-        </p:nvSpPr>
-        <p:spPr>
-          <a:xfrm>
-            <a:off x="381300" y="685800"/>
-            <a:ext cx="6096000" cy="3429000"/>
-          </a:xfrm>
-          <a:custGeom>
-            <a:rect b="b" l="l" r="r" t="t"/>
-            <a:pathLst>
-              <a:path extrusionOk="0" h="120000" w="120000">
-                <a:moveTo>
-                  <a:pt x="0" y="0"/>
-                </a:moveTo>
-                <a:lnTo>
-                  <a:pt x="120000" y="0"/>
-                </a:lnTo>
-                <a:lnTo>
-                  <a:pt x="120000" y="120000"/>
-                </a:lnTo>
-                <a:lnTo>
-                  <a:pt x="0" y="120000"/>
-                </a:lnTo>
-                <a:close/>
-              </a:path>
-            </a:pathLst>
-          </a:custGeom>
-        </p:spPr>
-      </p:sp>
-      <p:sp>
-        <p:nvSpPr>
-          <p:cNvPr id="65" name="Google Shape;65;g3c94b0d3aed_3_335:notes"/>
-          <p:cNvSpPr txBox="1"/>
-          <p:nvPr>
-            <p:ph idx="1" type="body"/>
-          </p:nvPr>
-        </p:nvSpPr>
-        <p:spPr>
-          <a:xfrm>
-            <a:off x="685800" y="4343400"/>
-            <a:ext cx="5486400" cy="4114800"/>
-          </a:xfrm>
-          <a:prstGeom prst="rect">
-            <a:avLst/>
-          </a:prstGeom>
-        </p:spPr>
-        <p:txBody>
-          <a:bodyPr anchorCtr="0" anchor="t" bIns="91425" lIns="91425" spcFirstLastPara="1" rIns="91425" wrap="square" tIns="91425">
-            <a:noAutofit/>
-          </a:bodyPr>
-          <a:lstStyle/>
-          <a:p>
-            <a:pPr indent="0" lvl="0" marL="0" rtl="0" algn="l">
-              <a:spcBef>
-                <a:spcPts val="0"/>
-              </a:spcBef>
-              <a:spcAft>
-                <a:spcPts val="0"/>
-              </a:spcAft>
-              <a:buNone/>
-            </a:pPr>
-            <a:r>
-              <a:t/>
-            </a:r>
-            <a:endParaRPr/>
-          </a:p>
-        </p:txBody>
-      </p:sp>
-    </p:spTree>
-  </p:cSld>
-  <p:clrMapOvr>
-    <a:masterClrMapping/>
-  </p:clrMapOvr>
-</p:notes>
-</file>
-
-<file path=ppt/notesSlides/notesSlide30.xml><?xml version="1.0" encoding="utf-8"?>
-<p:notes xmlns:a="http://schemas.openxmlformats.org/drawingml/2006/main" xmlns:r="http://schemas.openxmlformats.org/officeDocument/2006/relationships" xmlns:mc="http://schemas.openxmlformats.org/markup-compatibility/2006" xmlns:mv="urn:schemas-microsoft-com:mac:vml" xmlns:p="http://schemas.openxmlformats.org/presentationml/2006/main" xmlns:c="http://schemas.openxmlformats.org/drawingml/2006/chart" xmlns:dgm="http://schemas.openxmlformats.org/drawingml/2006/diagram" xmlns:o="urn:schemas-microsoft-com:office:office" xmlns:v="urn:schemas-microsoft-com:vml" xmlns:pvml="urn:schemas-microsoft-com:office:powerpoint" xmlns:com="http://schemas.openxmlformats.org/drawingml/2006/compatibility" xmlns:p14="http://schemas.microsoft.com/office/powerpoint/2010/main" xmlns:p15="http://schemas.microsoft.com/office/powerpoint/2012/main" xmlns:ahyp="http://schemas.microsoft.com/office/drawing/2018/hyperlinkcolor" showMasterPhAnim="0" showMasterSp="0">
-  <p:cSld>
-    <p:spTree>
-      <p:nvGrpSpPr>
-        <p:cNvPr id="339" name="Shape 339"/>
-        <p:cNvGrpSpPr/>
-        <p:nvPr/>
-      </p:nvGrpSpPr>
-      <p:grpSpPr>
-        <a:xfrm>
-          <a:off x="0" y="0"/>
-          <a:ext cx="0" cy="0"/>
-          <a:chOff x="0" y="0"/>
-          <a:chExt cx="0" cy="0"/>
-        </a:xfrm>
-      </p:grpSpPr>
-      <p:sp>
-        <p:nvSpPr>
-          <p:cNvPr id="340" name="Google Shape;340;g3c889b9f61b_0_40:notes"/>
-          <p:cNvSpPr/>
-          <p:nvPr>
-            <p:ph idx="2" type="sldImg"/>
-          </p:nvPr>
-        </p:nvSpPr>
-        <p:spPr>
-          <a:xfrm>
-            <a:off x="381300" y="685800"/>
-            <a:ext cx="6096000" cy="3429000"/>
-          </a:xfrm>
-          <a:custGeom>
-            <a:rect b="b" l="l" r="r" t="t"/>
-            <a:pathLst>
-              <a:path extrusionOk="0" h="120000" w="120000">
-                <a:moveTo>
-                  <a:pt x="0" y="0"/>
-                </a:moveTo>
-                <a:lnTo>
-                  <a:pt x="120000" y="0"/>
-                </a:lnTo>
-                <a:lnTo>
-                  <a:pt x="120000" y="120000"/>
-                </a:lnTo>
-                <a:lnTo>
-                  <a:pt x="0" y="120000"/>
-                </a:lnTo>
-                <a:close/>
-              </a:path>
-            </a:pathLst>
-          </a:custGeom>
-        </p:spPr>
-      </p:sp>
-      <p:sp>
-        <p:nvSpPr>
-          <p:cNvPr id="341" name="Google Shape;341;g3c889b9f61b_0_40:notes"/>
-          <p:cNvSpPr txBox="1"/>
-          <p:nvPr>
-            <p:ph idx="1" type="body"/>
-          </p:nvPr>
-        </p:nvSpPr>
-        <p:spPr>
-          <a:xfrm>
-            <a:off x="685800" y="4343400"/>
-            <a:ext cx="5486400" cy="4114800"/>
-          </a:xfrm>
-          <a:prstGeom prst="rect">
-            <a:avLst/>
-          </a:prstGeom>
-        </p:spPr>
-        <p:txBody>
-          <a:bodyPr anchorCtr="0" anchor="t" bIns="91425" lIns="91425" spcFirstLastPara="1" rIns="91425" wrap="square" tIns="91425">
-            <a:noAutofit/>
-          </a:bodyPr>
-          <a:lstStyle/>
-          <a:p>
-            <a:pPr indent="0" lvl="0" marL="0" rtl="0" algn="l">
-              <a:spcBef>
-                <a:spcPts val="0"/>
-              </a:spcBef>
-              <a:spcAft>
-                <a:spcPts val="0"/>
-              </a:spcAft>
-              <a:buNone/>
-            </a:pPr>
-            <a:r>
-              <a:t/>
-            </a:r>
-            <a:endParaRPr/>
-          </a:p>
-        </p:txBody>
-      </p:sp>
-    </p:spTree>
-  </p:cSld>
-  <p:clrMapOvr>
-    <a:masterClrMapping/>
-  </p:clrMapOvr>
-</p:notes>
-</file>
-
-<file path=ppt/notesSlides/notesSlide31.xml><?xml version="1.0" encoding="utf-8"?>
-<p:notes xmlns:a="http://schemas.openxmlformats.org/drawingml/2006/main" xmlns:r="http://schemas.openxmlformats.org/officeDocument/2006/relationships" xmlns:mc="http://schemas.openxmlformats.org/markup-compatibility/2006" xmlns:mv="urn:schemas-microsoft-com:mac:vml" xmlns:p="http://schemas.openxmlformats.org/presentationml/2006/main" xmlns:c="http://schemas.openxmlformats.org/drawingml/2006/chart" xmlns:dgm="http://schemas.openxmlformats.org/drawingml/2006/diagram" xmlns:o="urn:schemas-microsoft-com:office:office" xmlns:v="urn:schemas-microsoft-com:vml" xmlns:pvml="urn:schemas-microsoft-com:office:powerpoint" xmlns:com="http://schemas.openxmlformats.org/drawingml/2006/compatibility" xmlns:p14="http://schemas.microsoft.com/office/powerpoint/2010/main" xmlns:p15="http://schemas.microsoft.com/office/powerpoint/2012/main" xmlns:ahyp="http://schemas.microsoft.com/office/drawing/2018/hyperlinkcolor" showMasterPhAnim="0" showMasterSp="0">
-  <p:cSld>
-    <p:spTree>
-      <p:nvGrpSpPr>
-        <p:cNvPr id="345" name="Shape 345"/>
-        <p:cNvGrpSpPr/>
-        <p:nvPr/>
-      </p:nvGrpSpPr>
-      <p:grpSpPr>
-        <a:xfrm>
-          <a:off x="0" y="0"/>
-          <a:ext cx="0" cy="0"/>
-          <a:chOff x="0" y="0"/>
-          <a:chExt cx="0" cy="0"/>
-        </a:xfrm>
-      </p:grpSpPr>
-      <p:sp>
-        <p:nvSpPr>
-          <p:cNvPr id="346" name="Google Shape;346;g3c94b0d3aed_2_108:notes"/>
-          <p:cNvSpPr/>
-          <p:nvPr>
-            <p:ph idx="2" type="sldImg"/>
-          </p:nvPr>
-        </p:nvSpPr>
-        <p:spPr>
-          <a:xfrm>
-            <a:off x="381300" y="685800"/>
-            <a:ext cx="6096000" cy="3429000"/>
-          </a:xfrm>
-          <a:custGeom>
-            <a:rect b="b" l="l" r="r" t="t"/>
-            <a:pathLst>
-              <a:path extrusionOk="0" h="120000" w="120000">
-                <a:moveTo>
-                  <a:pt x="0" y="0"/>
-                </a:moveTo>
-                <a:lnTo>
-                  <a:pt x="120000" y="0"/>
-                </a:lnTo>
-                <a:lnTo>
-                  <a:pt x="120000" y="120000"/>
-                </a:lnTo>
-                <a:lnTo>
-                  <a:pt x="0" y="120000"/>
-                </a:lnTo>
-                <a:close/>
-              </a:path>
-            </a:pathLst>
-          </a:custGeom>
-        </p:spPr>
-      </p:sp>
-      <p:sp>
-        <p:nvSpPr>
-          <p:cNvPr id="347" name="Google Shape;347;g3c94b0d3aed_2_108:notes"/>
-          <p:cNvSpPr txBox="1"/>
-          <p:nvPr>
-            <p:ph idx="1" type="body"/>
-          </p:nvPr>
-        </p:nvSpPr>
-        <p:spPr>
-          <a:xfrm>
-            <a:off x="685800" y="4343400"/>
-            <a:ext cx="5486400" cy="4114800"/>
-          </a:xfrm>
-          <a:prstGeom prst="rect">
-            <a:avLst/>
-          </a:prstGeom>
-        </p:spPr>
-        <p:txBody>
-          <a:bodyPr anchorCtr="0" anchor="t" bIns="91425" lIns="91425" spcFirstLastPara="1" rIns="91425" wrap="square" tIns="91425">
-            <a:noAutofit/>
-          </a:bodyPr>
-          <a:lstStyle/>
-          <a:p>
-            <a:pPr indent="0" lvl="0" marL="0" rtl="0" algn="l">
-              <a:spcBef>
-                <a:spcPts val="0"/>
-              </a:spcBef>
-              <a:spcAft>
-                <a:spcPts val="0"/>
-              </a:spcAft>
-              <a:buNone/>
-            </a:pPr>
-            <a:r>
-              <a:t/>
-            </a:r>
-            <a:endParaRPr/>
-          </a:p>
-        </p:txBody>
-      </p:sp>
-    </p:spTree>
-  </p:cSld>
-  <p:clrMapOvr>
-    <a:masterClrMapping/>
-  </p:clrMapOvr>
-</p:notes>
-</file>
-
-<file path=ppt/notesSlides/notesSlide32.xml><?xml version="1.0" encoding="utf-8"?>
-<p:notes xmlns:a="http://schemas.openxmlformats.org/drawingml/2006/main" xmlns:r="http://schemas.openxmlformats.org/officeDocument/2006/relationships" xmlns:mc="http://schemas.openxmlformats.org/markup-compatibility/2006" xmlns:mv="urn:schemas-microsoft-com:mac:vml" xmlns:p="http://schemas.openxmlformats.org/presentationml/2006/main" xmlns:c="http://schemas.openxmlformats.org/drawingml/2006/chart" xmlns:dgm="http://schemas.openxmlformats.org/drawingml/2006/diagram" xmlns:o="urn:schemas-microsoft-com:office:office" xmlns:v="urn:schemas-microsoft-com:vml" xmlns:pvml="urn:schemas-microsoft-com:office:powerpoint" xmlns:com="http://schemas.openxmlformats.org/drawingml/2006/compatibility" xmlns:p14="http://schemas.microsoft.com/office/powerpoint/2010/main" xmlns:p15="http://schemas.microsoft.com/office/powerpoint/2012/main" xmlns:ahyp="http://schemas.microsoft.com/office/drawing/2018/hyperlinkcolor" showMasterPhAnim="0" showMasterSp="0">
-  <p:cSld>
-    <p:spTree>
-      <p:nvGrpSpPr>
-        <p:cNvPr id="351" name="Shape 351"/>
-        <p:cNvGrpSpPr/>
-        <p:nvPr/>
-      </p:nvGrpSpPr>
-      <p:grpSpPr>
-        <a:xfrm>
-          <a:off x="0" y="0"/>
-          <a:ext cx="0" cy="0"/>
-          <a:chOff x="0" y="0"/>
-          <a:chExt cx="0" cy="0"/>
-        </a:xfrm>
-      </p:grpSpPr>
-      <p:sp>
-        <p:nvSpPr>
-          <p:cNvPr id="352" name="Google Shape;352;g3c938d30641_0_0:notes"/>
-          <p:cNvSpPr/>
-          <p:nvPr>
-            <p:ph idx="2" type="sldImg"/>
-          </p:nvPr>
-        </p:nvSpPr>
-        <p:spPr>
-          <a:xfrm>
-            <a:off x="381300" y="685800"/>
-            <a:ext cx="6096000" cy="3429000"/>
-          </a:xfrm>
-          <a:custGeom>
-            <a:rect b="b" l="l" r="r" t="t"/>
-            <a:pathLst>
-              <a:path extrusionOk="0" h="120000" w="120000">
-                <a:moveTo>
-                  <a:pt x="0" y="0"/>
-                </a:moveTo>
-                <a:lnTo>
-                  <a:pt x="120000" y="0"/>
-                </a:lnTo>
-                <a:lnTo>
-                  <a:pt x="120000" y="120000"/>
-                </a:lnTo>
-                <a:lnTo>
-                  <a:pt x="0" y="120000"/>
-                </a:lnTo>
-                <a:close/>
-              </a:path>
-            </a:pathLst>
-          </a:custGeom>
-        </p:spPr>
-      </p:sp>
-      <p:sp>
-        <p:nvSpPr>
-          <p:cNvPr id="353" name="Google Shape;353;g3c938d30641_0_0:notes"/>
-          <p:cNvSpPr txBox="1"/>
-          <p:nvPr>
-            <p:ph idx="1" type="body"/>
-          </p:nvPr>
-        </p:nvSpPr>
-        <p:spPr>
-          <a:xfrm>
-            <a:off x="685800" y="4343400"/>
-            <a:ext cx="5486400" cy="4114800"/>
-          </a:xfrm>
-          <a:prstGeom prst="rect">
-            <a:avLst/>
-          </a:prstGeom>
-        </p:spPr>
-        <p:txBody>
-          <a:bodyPr anchorCtr="0" anchor="t" bIns="91425" lIns="91425" spcFirstLastPara="1" rIns="91425" wrap="square" tIns="91425">
-            <a:noAutofit/>
-          </a:bodyPr>
-          <a:lstStyle/>
-          <a:p>
-            <a:pPr indent="0" lvl="0" marL="0" rtl="0" algn="l">
-              <a:spcBef>
-                <a:spcPts val="0"/>
-              </a:spcBef>
-              <a:spcAft>
-                <a:spcPts val="0"/>
-              </a:spcAft>
-              <a:buNone/>
-            </a:pPr>
-            <a:r>
-              <a:t/>
-            </a:r>
-            <a:endParaRPr/>
-          </a:p>
-        </p:txBody>
-      </p:sp>
-    </p:spTree>
-  </p:cSld>
-  <p:clrMapOvr>
-    <a:masterClrMapping/>
-  </p:clrMapOvr>
-</p:notes>
-</file>
-
-<file path=ppt/notesSlides/notesSlide33.xml><?xml version="1.0" encoding="utf-8"?>
-<p:notes xmlns:a="http://schemas.openxmlformats.org/drawingml/2006/main" xmlns:r="http://schemas.openxmlformats.org/officeDocument/2006/relationships" xmlns:mc="http://schemas.openxmlformats.org/markup-compatibility/2006" xmlns:mv="urn:schemas-microsoft-com:mac:vml" xmlns:p="http://schemas.openxmlformats.org/presentationml/2006/main" xmlns:c="http://schemas.openxmlformats.org/drawingml/2006/chart" xmlns:dgm="http://schemas.openxmlformats.org/drawingml/2006/diagram" xmlns:o="urn:schemas-microsoft-com:office:office" xmlns:v="urn:schemas-microsoft-com:vml" xmlns:pvml="urn:schemas-microsoft-com:office:powerpoint" xmlns:com="http://schemas.openxmlformats.org/drawingml/2006/compatibility" xmlns:p14="http://schemas.microsoft.com/office/powerpoint/2010/main" xmlns:p15="http://schemas.microsoft.com/office/powerpoint/2012/main" xmlns:ahyp="http://schemas.microsoft.com/office/drawing/2018/hyperlinkcolor" showMasterPhAnim="0" showMasterSp="0">
-  <p:cSld>
-    <p:spTree>
-      <p:nvGrpSpPr>
-        <p:cNvPr id="356" name="Shape 356"/>
-        <p:cNvGrpSpPr/>
-        <p:nvPr/>
-      </p:nvGrpSpPr>
-      <p:grpSpPr>
-        <a:xfrm>
-          <a:off x="0" y="0"/>
-          <a:ext cx="0" cy="0"/>
-          <a:chOff x="0" y="0"/>
-          <a:chExt cx="0" cy="0"/>
-        </a:xfrm>
-      </p:grpSpPr>
-      <p:sp>
-        <p:nvSpPr>
-          <p:cNvPr id="357" name="Google Shape;357;g3c94b0d3aed_2_77:notes"/>
-          <p:cNvSpPr/>
-          <p:nvPr>
-            <p:ph idx="2" type="sldImg"/>
-          </p:nvPr>
-        </p:nvSpPr>
-        <p:spPr>
-          <a:xfrm>
-            <a:off x="381300" y="685800"/>
-            <a:ext cx="6096000" cy="3429000"/>
-          </a:xfrm>
-          <a:custGeom>
-            <a:rect b="b" l="l" r="r" t="t"/>
-            <a:pathLst>
-              <a:path extrusionOk="0" h="120000" w="120000">
-                <a:moveTo>
-                  <a:pt x="0" y="0"/>
-                </a:moveTo>
-                <a:lnTo>
-                  <a:pt x="120000" y="0"/>
-                </a:lnTo>
-                <a:lnTo>
-                  <a:pt x="120000" y="120000"/>
-                </a:lnTo>
-                <a:lnTo>
-                  <a:pt x="0" y="120000"/>
-                </a:lnTo>
-                <a:close/>
-              </a:path>
-            </a:pathLst>
-          </a:custGeom>
-        </p:spPr>
-      </p:sp>
-      <p:sp>
-        <p:nvSpPr>
-          <p:cNvPr id="358" name="Google Shape;358;g3c94b0d3aed_2_77:notes"/>
-          <p:cNvSpPr txBox="1"/>
-          <p:nvPr>
-            <p:ph idx="1" type="body"/>
-          </p:nvPr>
-        </p:nvSpPr>
-        <p:spPr>
-          <a:xfrm>
-            <a:off x="685800" y="4343400"/>
-            <a:ext cx="5486400" cy="4114800"/>
-          </a:xfrm>
-          <a:prstGeom prst="rect">
-            <a:avLst/>
-          </a:prstGeom>
-        </p:spPr>
-        <p:txBody>
-          <a:bodyPr anchorCtr="0" anchor="t" bIns="91425" lIns="91425" spcFirstLastPara="1" rIns="91425" wrap="square" tIns="91425">
-            <a:noAutofit/>
-          </a:bodyPr>
-          <a:lstStyle/>
-          <a:p>
-            <a:pPr indent="0" lvl="0" marL="0" rtl="0" algn="l">
-              <a:spcBef>
-                <a:spcPts val="0"/>
-              </a:spcBef>
-              <a:spcAft>
-                <a:spcPts val="0"/>
-              </a:spcAft>
-              <a:buNone/>
-            </a:pPr>
-            <a:r>
-              <a:t/>
-            </a:r>
-            <a:endParaRPr/>
-          </a:p>
-        </p:txBody>
-      </p:sp>
-    </p:spTree>
-  </p:cSld>
-  <p:clrMapOvr>
-    <a:masterClrMapping/>
-  </p:clrMapOvr>
-</p:notes>
-</file>
-
-<file path=ppt/notesSlides/notesSlide4.xml><?xml version="1.0" encoding="utf-8"?>
-<p:notes xmlns:a="http://schemas.openxmlformats.org/drawingml/2006/main" xmlns:r="http://schemas.openxmlformats.org/officeDocument/2006/relationships" xmlns:mc="http://schemas.openxmlformats.org/markup-compatibility/2006" xmlns:mv="urn:schemas-microsoft-com:mac:vml" xmlns:p="http://schemas.openxmlformats.org/presentationml/2006/main" xmlns:c="http://schemas.openxmlformats.org/drawingml/2006/chart" xmlns:dgm="http://schemas.openxmlformats.org/drawingml/2006/diagram" xmlns:o="urn:schemas-microsoft-com:office:office" xmlns:v="urn:schemas-microsoft-com:vml" xmlns:pvml="urn:schemas-microsoft-com:office:powerpoint" xmlns:com="http://schemas.openxmlformats.org/drawingml/2006/compatibility" xmlns:p14="http://schemas.microsoft.com/office/powerpoint/2010/main" xmlns:p15="http://schemas.microsoft.com/office/powerpoint/2012/main" xmlns:ahyp="http://schemas.microsoft.com/office/drawing/2018/hyperlinkcolor" showMasterPhAnim="0" showMasterSp="0">
-  <p:cSld>
-    <p:spTree>
-      <p:nvGrpSpPr>
-        <p:cNvPr id="71" name="Shape 71"/>
-        <p:cNvGrpSpPr/>
-        <p:nvPr/>
-      </p:nvGrpSpPr>
-      <p:grpSpPr>
-        <a:xfrm>
-          <a:off x="0" y="0"/>
-          <a:ext cx="0" cy="0"/>
-          <a:chOff x="0" y="0"/>
-          <a:chExt cx="0" cy="0"/>
-        </a:xfrm>
-      </p:grpSpPr>
-      <p:sp>
-        <p:nvSpPr>
-          <p:cNvPr id="72" name="Google Shape;72;g3c94b0d3aed_3_344:notes"/>
-          <p:cNvSpPr/>
-          <p:nvPr>
-            <p:ph idx="2" type="sldImg"/>
-          </p:nvPr>
-        </p:nvSpPr>
-        <p:spPr>
-          <a:xfrm>
-            <a:off x="381300" y="685800"/>
-            <a:ext cx="6096000" cy="3429000"/>
-          </a:xfrm>
-          <a:custGeom>
-            <a:rect b="b" l="l" r="r" t="t"/>
-            <a:pathLst>
-              <a:path extrusionOk="0" h="120000" w="120000">
-                <a:moveTo>
-                  <a:pt x="0" y="0"/>
-                </a:moveTo>
-                <a:lnTo>
-                  <a:pt x="120000" y="0"/>
-                </a:lnTo>
-                <a:lnTo>
-                  <a:pt x="120000" y="120000"/>
-                </a:lnTo>
-                <a:lnTo>
-                  <a:pt x="0" y="120000"/>
-                </a:lnTo>
-                <a:close/>
-              </a:path>
-            </a:pathLst>
-          </a:custGeom>
-        </p:spPr>
-      </p:sp>
-      <p:sp>
-        <p:nvSpPr>
-          <p:cNvPr id="73" name="Google Shape;73;g3c94b0d3aed_3_344:notes"/>
-          <p:cNvSpPr txBox="1"/>
-          <p:nvPr>
-            <p:ph idx="1" type="body"/>
-          </p:nvPr>
-        </p:nvSpPr>
-        <p:spPr>
-          <a:xfrm>
-            <a:off x="685800" y="4343400"/>
-            <a:ext cx="5486400" cy="4114800"/>
-          </a:xfrm>
-          <a:prstGeom prst="rect">
-            <a:avLst/>
-          </a:prstGeom>
-        </p:spPr>
-        <p:txBody>
-          <a:bodyPr anchorCtr="0" anchor="t" bIns="91425" lIns="91425" spcFirstLastPara="1" rIns="91425" wrap="square" tIns="91425">
-            <a:noAutofit/>
-          </a:bodyPr>
-          <a:lstStyle/>
-          <a:p>
-            <a:pPr indent="0" lvl="0" marL="0" rtl="0" algn="l">
-              <a:spcBef>
-                <a:spcPts val="0"/>
-              </a:spcBef>
-              <a:spcAft>
-                <a:spcPts val="0"/>
-              </a:spcAft>
-              <a:buNone/>
-            </a:pPr>
-            <a:r>
-              <a:t/>
-            </a:r>
-            <a:endParaRPr/>
-          </a:p>
-        </p:txBody>
-      </p:sp>
-    </p:spTree>
-  </p:cSld>
-  <p:clrMapOvr>
-    <a:masterClrMapping/>
-  </p:clrMapOvr>
-</p:notes>
-</file>
-
-<file path=ppt/notesSlides/notesSlide5.xml><?xml version="1.0" encoding="utf-8"?>
-<p:notes xmlns:a="http://schemas.openxmlformats.org/drawingml/2006/main" xmlns:r="http://schemas.openxmlformats.org/officeDocument/2006/relationships" xmlns:mc="http://schemas.openxmlformats.org/markup-compatibility/2006" xmlns:mv="urn:schemas-microsoft-com:mac:vml" xmlns:p="http://schemas.openxmlformats.org/presentationml/2006/main" xmlns:c="http://schemas.openxmlformats.org/drawingml/2006/chart" xmlns:dgm="http://schemas.openxmlformats.org/drawingml/2006/diagram" xmlns:o="urn:schemas-microsoft-com:office:office" xmlns:v="urn:schemas-microsoft-com:vml" xmlns:pvml="urn:schemas-microsoft-com:office:powerpoint" xmlns:com="http://schemas.openxmlformats.org/drawingml/2006/compatibility" xmlns:p14="http://schemas.microsoft.com/office/powerpoint/2010/main" xmlns:p15="http://schemas.microsoft.com/office/powerpoint/2012/main" xmlns:ahyp="http://schemas.microsoft.com/office/drawing/2018/hyperlinkcolor" showMasterPhAnim="0" showMasterSp="0">
-  <p:cSld>
-    <p:spTree>
-      <p:nvGrpSpPr>
-        <p:cNvPr id="79" name="Shape 79"/>
-        <p:cNvGrpSpPr/>
-        <p:nvPr/>
-      </p:nvGrpSpPr>
-      <p:grpSpPr>
-        <a:xfrm>
-          <a:off x="0" y="0"/>
-          <a:ext cx="0" cy="0"/>
-          <a:chOff x="0" y="0"/>
-          <a:chExt cx="0" cy="0"/>
-        </a:xfrm>
-      </p:grpSpPr>
-      <p:sp>
-        <p:nvSpPr>
-          <p:cNvPr id="80" name="Google Shape;80;g3c94b0d3aed_3_323:notes"/>
-          <p:cNvSpPr/>
-          <p:nvPr>
-            <p:ph idx="2" type="sldImg"/>
-          </p:nvPr>
-        </p:nvSpPr>
-        <p:spPr>
-          <a:xfrm>
-            <a:off x="381300" y="685800"/>
-            <a:ext cx="6096000" cy="3429000"/>
-          </a:xfrm>
-          <a:custGeom>
-            <a:rect b="b" l="l" r="r" t="t"/>
-            <a:pathLst>
-              <a:path extrusionOk="0" h="120000" w="120000">
-                <a:moveTo>
-                  <a:pt x="0" y="0"/>
-                </a:moveTo>
-                <a:lnTo>
-                  <a:pt x="120000" y="0"/>
-                </a:lnTo>
-                <a:lnTo>
-                  <a:pt x="120000" y="120000"/>
-                </a:lnTo>
-                <a:lnTo>
-                  <a:pt x="0" y="120000"/>
-                </a:lnTo>
-                <a:close/>
-              </a:path>
-            </a:pathLst>
-          </a:custGeom>
-        </p:spPr>
-      </p:sp>
-      <p:sp>
-        <p:nvSpPr>
-          <p:cNvPr id="81" name="Google Shape;81;g3c94b0d3aed_3_323:notes"/>
-          <p:cNvSpPr txBox="1"/>
-          <p:nvPr>
-            <p:ph idx="1" type="body"/>
-          </p:nvPr>
-        </p:nvSpPr>
-        <p:spPr>
-          <a:xfrm>
-            <a:off x="685800" y="4343400"/>
-            <a:ext cx="5486400" cy="4114800"/>
-          </a:xfrm>
-          <a:prstGeom prst="rect">
-            <a:avLst/>
-          </a:prstGeom>
-        </p:spPr>
-        <p:txBody>
-          <a:bodyPr anchorCtr="0" anchor="t" bIns="91425" lIns="91425" spcFirstLastPara="1" rIns="91425" wrap="square" tIns="91425">
-            <a:noAutofit/>
-          </a:bodyPr>
-          <a:lstStyle/>
-          <a:p>
-            <a:pPr indent="0" lvl="0" marL="0" rtl="0" algn="l">
-              <a:spcBef>
-                <a:spcPts val="0"/>
-              </a:spcBef>
-              <a:spcAft>
-                <a:spcPts val="0"/>
-              </a:spcAft>
-              <a:buNone/>
-            </a:pPr>
-            <a:r>
-              <a:t/>
-            </a:r>
-            <a:endParaRPr/>
-          </a:p>
-        </p:txBody>
-      </p:sp>
-    </p:spTree>
-  </p:cSld>
-  <p:clrMapOvr>
-    <a:masterClrMapping/>
-  </p:clrMapOvr>
-</p:notes>
-</file>
-
-<file path=ppt/notesSlides/notesSlide6.xml><?xml version="1.0" encoding="utf-8"?>
-<p:notes xmlns:a="http://schemas.openxmlformats.org/drawingml/2006/main" xmlns:r="http://schemas.openxmlformats.org/officeDocument/2006/relationships" xmlns:mc="http://schemas.openxmlformats.org/markup-compatibility/2006" xmlns:mv="urn:schemas-microsoft-com:mac:vml" xmlns:p="http://schemas.openxmlformats.org/presentationml/2006/main" xmlns:c="http://schemas.openxmlformats.org/drawingml/2006/chart" xmlns:dgm="http://schemas.openxmlformats.org/drawingml/2006/diagram" xmlns:o="urn:schemas-microsoft-com:office:office" xmlns:v="urn:schemas-microsoft-com:vml" xmlns:pvml="urn:schemas-microsoft-com:office:powerpoint" xmlns:com="http://schemas.openxmlformats.org/drawingml/2006/compatibility" xmlns:p14="http://schemas.microsoft.com/office/powerpoint/2010/main" xmlns:p15="http://schemas.microsoft.com/office/powerpoint/2012/main" xmlns:ahyp="http://schemas.microsoft.com/office/drawing/2018/hyperlinkcolor" showMasterPhAnim="0" showMasterSp="0">
-  <p:cSld>
-    <p:spTree>
-      <p:nvGrpSpPr>
-        <p:cNvPr id="87" name="Shape 87"/>
-        <p:cNvGrpSpPr/>
-        <p:nvPr/>
-      </p:nvGrpSpPr>
-      <p:grpSpPr>
-        <a:xfrm>
-          <a:off x="0" y="0"/>
-          <a:ext cx="0" cy="0"/>
-          <a:chOff x="0" y="0"/>
-          <a:chExt cx="0" cy="0"/>
-        </a:xfrm>
-      </p:grpSpPr>
-      <p:sp>
-        <p:nvSpPr>
-          <p:cNvPr id="88" name="Google Shape;88;g3c94b0d3aed_3_38:notes"/>
-          <p:cNvSpPr/>
-          <p:nvPr>
-            <p:ph idx="2" type="sldImg"/>
-          </p:nvPr>
-        </p:nvSpPr>
-        <p:spPr>
-          <a:xfrm>
-            <a:off x="381300" y="685800"/>
-            <a:ext cx="6096000" cy="3429000"/>
-          </a:xfrm>
-          <a:custGeom>
-            <a:rect b="b" l="l" r="r" t="t"/>
-            <a:pathLst>
-              <a:path extrusionOk="0" h="120000" w="120000">
-                <a:moveTo>
-                  <a:pt x="0" y="0"/>
-                </a:moveTo>
-                <a:lnTo>
-                  <a:pt x="120000" y="0"/>
-                </a:lnTo>
-                <a:lnTo>
-                  <a:pt x="120000" y="120000"/>
-                </a:lnTo>
-                <a:lnTo>
-                  <a:pt x="0" y="120000"/>
-                </a:lnTo>
-                <a:close/>
-              </a:path>
-            </a:pathLst>
-          </a:custGeom>
-        </p:spPr>
-      </p:sp>
-      <p:sp>
-        <p:nvSpPr>
-          <p:cNvPr id="89" name="Google Shape;89;g3c94b0d3aed_3_38:notes"/>
-          <p:cNvSpPr txBox="1"/>
-          <p:nvPr>
-            <p:ph idx="1" type="body"/>
-          </p:nvPr>
-        </p:nvSpPr>
-        <p:spPr>
-          <a:xfrm>
-            <a:off x="685800" y="4343400"/>
-            <a:ext cx="5486400" cy="4114800"/>
-          </a:xfrm>
-          <a:prstGeom prst="rect">
-            <a:avLst/>
-          </a:prstGeom>
-        </p:spPr>
-        <p:txBody>
-          <a:bodyPr anchorCtr="0" anchor="t" bIns="91425" lIns="91425" spcFirstLastPara="1" rIns="91425" wrap="square" tIns="91425">
-            <a:noAutofit/>
-          </a:bodyPr>
-          <a:lstStyle/>
-          <a:p>
-            <a:pPr indent="0" lvl="0" marL="0" rtl="0" algn="l">
-              <a:spcBef>
-                <a:spcPts val="0"/>
-              </a:spcBef>
-              <a:spcAft>
-                <a:spcPts val="0"/>
-              </a:spcAft>
-              <a:buNone/>
-            </a:pPr>
-            <a:r>
-              <a:t/>
-            </a:r>
-            <a:endParaRPr/>
-          </a:p>
-        </p:txBody>
-      </p:sp>
-    </p:spTree>
-  </p:cSld>
-  <p:clrMapOvr>
-    <a:masterClrMapping/>
-  </p:clrMapOvr>
-</p:notes>
-</file>
-
-<file path=ppt/notesSlides/notesSlide7.xml><?xml version="1.0" encoding="utf-8"?>
-<p:notes xmlns:a="http://schemas.openxmlformats.org/drawingml/2006/main" xmlns:r="http://schemas.openxmlformats.org/officeDocument/2006/relationships" xmlns:mc="http://schemas.openxmlformats.org/markup-compatibility/2006" xmlns:mv="urn:schemas-microsoft-com:mac:vml" xmlns:p="http://schemas.openxmlformats.org/presentationml/2006/main" xmlns:c="http://schemas.openxmlformats.org/drawingml/2006/chart" xmlns:dgm="http://schemas.openxmlformats.org/drawingml/2006/diagram" xmlns:o="urn:schemas-microsoft-com:office:office" xmlns:v="urn:schemas-microsoft-com:vml" xmlns:pvml="urn:schemas-microsoft-com:office:powerpoint" xmlns:com="http://schemas.openxmlformats.org/drawingml/2006/compatibility" xmlns:p14="http://schemas.microsoft.com/office/powerpoint/2010/main" xmlns:p15="http://schemas.microsoft.com/office/powerpoint/2012/main" xmlns:ahyp="http://schemas.microsoft.com/office/drawing/2018/hyperlinkcolor" showMasterPhAnim="0" showMasterSp="0">
-  <p:cSld>
-    <p:spTree>
-      <p:nvGrpSpPr>
-        <p:cNvPr id="103" name="Shape 103"/>
-        <p:cNvGrpSpPr/>
-        <p:nvPr/>
-      </p:nvGrpSpPr>
-      <p:grpSpPr>
-        <a:xfrm>
-          <a:off x="0" y="0"/>
-          <a:ext cx="0" cy="0"/>
-          <a:chOff x="0" y="0"/>
-          <a:chExt cx="0" cy="0"/>
-        </a:xfrm>
-      </p:grpSpPr>
-      <p:sp>
-        <p:nvSpPr>
-          <p:cNvPr id="104" name="Google Shape;104;g3c94b0d3aed_3_83:notes"/>
-          <p:cNvSpPr/>
-          <p:nvPr>
-            <p:ph idx="2" type="sldImg"/>
-          </p:nvPr>
-        </p:nvSpPr>
-        <p:spPr>
-          <a:xfrm>
-            <a:off x="381300" y="685800"/>
-            <a:ext cx="6096000" cy="3429000"/>
-          </a:xfrm>
-          <a:custGeom>
-            <a:rect b="b" l="l" r="r" t="t"/>
-            <a:pathLst>
-              <a:path extrusionOk="0" h="120000" w="120000">
-                <a:moveTo>
-                  <a:pt x="0" y="0"/>
-                </a:moveTo>
-                <a:lnTo>
-                  <a:pt x="120000" y="0"/>
-                </a:lnTo>
-                <a:lnTo>
-                  <a:pt x="120000" y="120000"/>
-                </a:lnTo>
-                <a:lnTo>
-                  <a:pt x="0" y="120000"/>
-                </a:lnTo>
-                <a:close/>
-              </a:path>
-            </a:pathLst>
-          </a:custGeom>
-        </p:spPr>
-      </p:sp>
-      <p:sp>
-        <p:nvSpPr>
-          <p:cNvPr id="105" name="Google Shape;105;g3c94b0d3aed_3_83:notes"/>
-          <p:cNvSpPr txBox="1"/>
-          <p:nvPr>
-            <p:ph idx="1" type="body"/>
-          </p:nvPr>
-        </p:nvSpPr>
-        <p:spPr>
-          <a:xfrm>
-            <a:off x="685800" y="4343400"/>
-            <a:ext cx="5486400" cy="4114800"/>
-          </a:xfrm>
-          <a:prstGeom prst="rect">
-            <a:avLst/>
-          </a:prstGeom>
-        </p:spPr>
-        <p:txBody>
-          <a:bodyPr anchorCtr="0" anchor="t" bIns="91425" lIns="91425" spcFirstLastPara="1" rIns="91425" wrap="square" tIns="91425">
-            <a:noAutofit/>
-          </a:bodyPr>
-          <a:lstStyle/>
-          <a:p>
-            <a:pPr indent="0" lvl="0" marL="0" rtl="0" algn="l">
-              <a:spcBef>
-                <a:spcPts val="0"/>
-              </a:spcBef>
-              <a:spcAft>
-                <a:spcPts val="0"/>
-              </a:spcAft>
-              <a:buNone/>
-            </a:pPr>
-            <a:r>
-              <a:t/>
-            </a:r>
-            <a:endParaRPr/>
-          </a:p>
-        </p:txBody>
-      </p:sp>
-    </p:spTree>
-  </p:cSld>
-  <p:clrMapOvr>
-    <a:masterClrMapping/>
-  </p:clrMapOvr>
-</p:notes>
-</file>
-
-<file path=ppt/notesSlides/notesSlide8.xml><?xml version="1.0" encoding="utf-8"?>
-<p:notes xmlns:a="http://schemas.openxmlformats.org/drawingml/2006/main" xmlns:r="http://schemas.openxmlformats.org/officeDocument/2006/relationships" xmlns:mc="http://schemas.openxmlformats.org/markup-compatibility/2006" xmlns:mv="urn:schemas-microsoft-com:mac:vml" xmlns:p="http://schemas.openxmlformats.org/presentationml/2006/main" xmlns:c="http://schemas.openxmlformats.org/drawingml/2006/chart" xmlns:dgm="http://schemas.openxmlformats.org/drawingml/2006/diagram" xmlns:o="urn:schemas-microsoft-com:office:office" xmlns:v="urn:schemas-microsoft-com:vml" xmlns:pvml="urn:schemas-microsoft-com:office:powerpoint" xmlns:com="http://schemas.openxmlformats.org/drawingml/2006/compatibility" xmlns:p14="http://schemas.microsoft.com/office/powerpoint/2010/main" xmlns:p15="http://schemas.microsoft.com/office/powerpoint/2012/main" xmlns:ahyp="http://schemas.microsoft.com/office/drawing/2018/hyperlinkcolor" showMasterPhAnim="0" showMasterSp="0">
-  <p:cSld>
-    <p:spTree>
-      <p:nvGrpSpPr>
-        <p:cNvPr id="119" name="Shape 119"/>
-        <p:cNvGrpSpPr/>
-        <p:nvPr/>
-      </p:nvGrpSpPr>
-      <p:grpSpPr>
-        <a:xfrm>
-          <a:off x="0" y="0"/>
-          <a:ext cx="0" cy="0"/>
-          <a:chOff x="0" y="0"/>
-          <a:chExt cx="0" cy="0"/>
-        </a:xfrm>
-      </p:grpSpPr>
-      <p:sp>
-        <p:nvSpPr>
-          <p:cNvPr id="120" name="Google Shape;120;g3c94b0d3aed_3_98:notes"/>
-          <p:cNvSpPr/>
-          <p:nvPr>
-            <p:ph idx="2" type="sldImg"/>
-          </p:nvPr>
-        </p:nvSpPr>
-        <p:spPr>
-          <a:xfrm>
-            <a:off x="381300" y="685800"/>
-            <a:ext cx="6096000" cy="3429000"/>
-          </a:xfrm>
-          <a:custGeom>
-            <a:rect b="b" l="l" r="r" t="t"/>
-            <a:pathLst>
-              <a:path extrusionOk="0" h="120000" w="120000">
-                <a:moveTo>
-                  <a:pt x="0" y="0"/>
-                </a:moveTo>
-                <a:lnTo>
-                  <a:pt x="120000" y="0"/>
-                </a:lnTo>
-                <a:lnTo>
-                  <a:pt x="120000" y="120000"/>
-                </a:lnTo>
-                <a:lnTo>
-                  <a:pt x="0" y="120000"/>
-                </a:lnTo>
-                <a:close/>
-              </a:path>
-            </a:pathLst>
-          </a:custGeom>
-        </p:spPr>
-      </p:sp>
-      <p:sp>
-        <p:nvSpPr>
-          <p:cNvPr id="121" name="Google Shape;121;g3c94b0d3aed_3_98:notes"/>
-          <p:cNvSpPr txBox="1"/>
-          <p:nvPr>
-            <p:ph idx="1" type="body"/>
-          </p:nvPr>
-        </p:nvSpPr>
-        <p:spPr>
-          <a:xfrm>
-            <a:off x="685800" y="4343400"/>
-            <a:ext cx="5486400" cy="4114800"/>
-          </a:xfrm>
-          <a:prstGeom prst="rect">
-            <a:avLst/>
-          </a:prstGeom>
-        </p:spPr>
-        <p:txBody>
-          <a:bodyPr anchorCtr="0" anchor="t" bIns="91425" lIns="91425" spcFirstLastPara="1" rIns="91425" wrap="square" tIns="91425">
-            <a:noAutofit/>
-          </a:bodyPr>
-          <a:lstStyle/>
-          <a:p>
-            <a:pPr indent="0" lvl="0" marL="0" rtl="0" algn="l">
-              <a:spcBef>
-                <a:spcPts val="0"/>
-              </a:spcBef>
-              <a:spcAft>
-                <a:spcPts val="0"/>
-              </a:spcAft>
-              <a:buNone/>
-            </a:pPr>
-            <a:r>
-              <a:t/>
-            </a:r>
-            <a:endParaRPr/>
-          </a:p>
-        </p:txBody>
-      </p:sp>
-    </p:spTree>
-  </p:cSld>
-  <p:clrMapOvr>
-    <a:masterClrMapping/>
-  </p:clrMapOvr>
-</p:notes>
-</file>
-
-<file path=ppt/notesSlides/notesSlide9.xml><?xml version="1.0" encoding="utf-8"?>
-<p:notes xmlns:a="http://schemas.openxmlformats.org/drawingml/2006/main" xmlns:r="http://schemas.openxmlformats.org/officeDocument/2006/relationships" xmlns:mc="http://schemas.openxmlformats.org/markup-compatibility/2006" xmlns:mv="urn:schemas-microsoft-com:mac:vml" xmlns:p="http://schemas.openxmlformats.org/presentationml/2006/main" xmlns:c="http://schemas.openxmlformats.org/drawingml/2006/chart" xmlns:dgm="http://schemas.openxmlformats.org/drawingml/2006/diagram" xmlns:o="urn:schemas-microsoft-com:office:office" xmlns:v="urn:schemas-microsoft-com:vml" xmlns:pvml="urn:schemas-microsoft-com:office:powerpoint" xmlns:com="http://schemas.openxmlformats.org/drawingml/2006/compatibility" xmlns:p14="http://schemas.microsoft.com/office/powerpoint/2010/main" xmlns:p15="http://schemas.microsoft.com/office/powerpoint/2012/main" xmlns:ahyp="http://schemas.microsoft.com/office/drawing/2018/hyperlinkcolor" showMasterPhAnim="0" showMasterSp="0">
-  <p:cSld>
-    <p:spTree>
-      <p:nvGrpSpPr>
-        <p:cNvPr id="135" name="Shape 135"/>
-        <p:cNvGrpSpPr/>
-        <p:nvPr/>
-      </p:nvGrpSpPr>
-      <p:grpSpPr>
-        <a:xfrm>
-          <a:off x="0" y="0"/>
-          <a:ext cx="0" cy="0"/>
-          <a:chOff x="0" y="0"/>
-          <a:chExt cx="0" cy="0"/>
-        </a:xfrm>
-      </p:grpSpPr>
-      <p:sp>
-        <p:nvSpPr>
-          <p:cNvPr id="136" name="Google Shape;136;g3c94b0d3aed_3_113:notes"/>
-          <p:cNvSpPr/>
-          <p:nvPr>
-            <p:ph idx="2" type="sldImg"/>
-          </p:nvPr>
-        </p:nvSpPr>
-        <p:spPr>
-          <a:xfrm>
-            <a:off x="381300" y="685800"/>
-            <a:ext cx="6096000" cy="3429000"/>
-          </a:xfrm>
-          <a:custGeom>
-            <a:rect b="b" l="l" r="r" t="t"/>
-            <a:pathLst>
-              <a:path extrusionOk="0" h="120000" w="120000">
-                <a:moveTo>
-                  <a:pt x="0" y="0"/>
-                </a:moveTo>
-                <a:lnTo>
-                  <a:pt x="120000" y="0"/>
-                </a:lnTo>
-                <a:lnTo>
-                  <a:pt x="120000" y="120000"/>
-                </a:lnTo>
-                <a:lnTo>
-                  <a:pt x="0" y="120000"/>
-                </a:lnTo>
-                <a:close/>
-              </a:path>
-            </a:pathLst>
-          </a:custGeom>
-        </p:spPr>
-      </p:sp>
-      <p:sp>
-        <p:nvSpPr>
-          <p:cNvPr id="137" name="Google Shape;137;g3c94b0d3aed_3_113:notes"/>
-          <p:cNvSpPr txBox="1"/>
-          <p:nvPr>
-            <p:ph idx="1" type="body"/>
-          </p:nvPr>
-        </p:nvSpPr>
-        <p:spPr>
-          <a:xfrm>
-            <a:off x="685800" y="4343400"/>
-            <a:ext cx="5486400" cy="4114800"/>
-          </a:xfrm>
-          <a:prstGeom prst="rect">
-            <a:avLst/>
-          </a:prstGeom>
-        </p:spPr>
-        <p:txBody>
-          <a:bodyPr anchorCtr="0" anchor="t" bIns="91425" lIns="91425" spcFirstLastPara="1" rIns="91425" wrap="square" tIns="91425">
-            <a:noAutofit/>
-          </a:bodyPr>
-          <a:lstStyle/>
-          <a:p>
-            <a:pPr indent="0" lvl="0" marL="0" rtl="0" algn="l">
-              <a:spcBef>
-                <a:spcPts val="0"/>
-              </a:spcBef>
-              <a:spcAft>
-                <a:spcPts val="0"/>
-              </a:spcAft>
-              <a:buNone/>
-            </a:pPr>
-            <a:r>
-              <a:t/>
-            </a:r>
-            <a:endParaRPr/>
-          </a:p>
-        </p:txBody>
-      </p:sp>
-    </p:spTree>
-  </p:cSld>
-  <p:clrMapOvr>
-    <a:masterClrMapping/>
-  </p:clrMapOvr>
-</p:notes>
 </file>
 
 <file path=ppt/slideLayouts/slideLayout1.xml><?xml version="1.0" encoding="utf-8"?>
@@ -8842,62 +5119,6 @@
           </a:p>
         </p:txBody>
       </p:sp>
-      <p:sp>
-        <p:nvSpPr>
-          <p:cNvPr id="56" name="Google Shape;56;p13"/>
-          <p:cNvSpPr txBox="1"/>
-          <p:nvPr>
-            <p:ph idx="1" type="subTitle"/>
-          </p:nvPr>
-        </p:nvSpPr>
-        <p:spPr>
-          <a:xfrm>
-            <a:off x="311700" y="1843525"/>
-            <a:ext cx="8520600" cy="792600"/>
-          </a:xfrm>
-          <a:prstGeom prst="rect">
-            <a:avLst/>
-          </a:prstGeom>
-        </p:spPr>
-        <p:txBody>
-          <a:bodyPr anchorCtr="0" anchor="t" bIns="91425" lIns="91425" spcFirstLastPara="1" rIns="91425" wrap="square" tIns="91425">
-            <a:normAutofit fontScale="92500"/>
-          </a:bodyPr>
-          <a:lstStyle/>
-          <a:p>
-            <a:pPr indent="0" lvl="0" marL="0" rtl="0" algn="ctr">
-              <a:spcBef>
-                <a:spcPts val="0"/>
-              </a:spcBef>
-              <a:spcAft>
-                <a:spcPts val="0"/>
-              </a:spcAft>
-              <a:buNone/>
-            </a:pPr>
-            <a:r>
-              <a:rPr lang="en"/>
-              <a:t>Lars </a:t>
-            </a:r>
-            <a:r>
-              <a:rPr lang="en"/>
-              <a:t>Goozen, Derek </a:t>
-            </a:r>
-            <a:r>
-              <a:rPr lang="en"/>
-              <a:t>Hodgkins, Caden </a:t>
-            </a:r>
-            <a:r>
-              <a:rPr lang="en"/>
-              <a:t>Kane, Zong </a:t>
-            </a:r>
-            <a:r>
-              <a:rPr lang="en"/>
-              <a:t>Xiong</a:t>
-            </a:r>
-            <a:endParaRPr/>
-          </a:p>
-        </p:txBody>
-      </p:sp>
     </p:spTree>
   </p:cSld>
   <p:clrMapOvr>
@@ -12233,26 +8454,6 @@
             </a:r>
             <a:endParaRPr/>
           </a:p>
-          <a:p>
-            <a:pPr indent="-342900" lvl="0" marL="457200" rtl="0" algn="l">
-              <a:lnSpc>
-                <a:spcPct val="150000"/>
-              </a:lnSpc>
-              <a:spcBef>
-                <a:spcPts val="0"/>
-              </a:spcBef>
-              <a:spcAft>
-                <a:spcPts val="0"/>
-              </a:spcAft>
-              <a:buSzPts val="1800"/>
-              <a:buAutoNum type="arabicPeriod"/>
-            </a:pPr>
-            <a:r>
-              <a:rPr lang="en"/>
-              <a:t>Roles</a:t>
-            </a:r>
-            <a:endParaRPr/>
-          </a:p>
         </p:txBody>
       </p:sp>
     </p:spTree>
@@ -14532,275 +10733,6 @@
             <a:r>
               <a:rPr lang="en"/>
               <a:t>End-to-end (E2E)</a:t>
-            </a:r>
-            <a:endParaRPr/>
-          </a:p>
-          <a:p>
-            <a:pPr indent="-317500" lvl="1" marL="914400" rtl="0" algn="l">
-              <a:lnSpc>
-                <a:spcPct val="150000"/>
-              </a:lnSpc>
-              <a:spcBef>
-                <a:spcPts val="0"/>
-              </a:spcBef>
-              <a:spcAft>
-                <a:spcPts val="0"/>
-              </a:spcAft>
-              <a:buSzPts val="1400"/>
-              <a:buChar char="○"/>
-            </a:pPr>
-            <a:r>
-              <a:rPr lang="en"/>
-              <a:t>Dr. Neumayer</a:t>
-            </a:r>
-            <a:endParaRPr/>
-          </a:p>
-        </p:txBody>
-      </p:sp>
-    </p:spTree>
-  </p:cSld>
-  <p:clrMapOvr>
-    <a:masterClrMapping/>
-  </p:clrMapOvr>
-</p:sld>
-</file>
-
-<file path=ppt/slides/slide31.xml><?xml version="1.0" encoding="utf-8"?>
-<p:sld xmlns:a="http://schemas.openxmlformats.org/drawingml/2006/main" xmlns:r="http://schemas.openxmlformats.org/officeDocument/2006/relationships" xmlns:mc="http://schemas.openxmlformats.org/markup-compatibility/2006" xmlns:mv="urn:schemas-microsoft-com:mac:vml" xmlns:p="http://schemas.openxmlformats.org/presentationml/2006/main" xmlns:c="http://schemas.openxmlformats.org/drawingml/2006/chart" xmlns:dgm="http://schemas.openxmlformats.org/drawingml/2006/diagram" xmlns:o="urn:schemas-microsoft-com:office:office" xmlns:v="urn:schemas-microsoft-com:vml" xmlns:pvml="urn:schemas-microsoft-com:office:powerpoint" xmlns:com="http://schemas.openxmlformats.org/drawingml/2006/compatibility" xmlns:p14="http://schemas.microsoft.com/office/powerpoint/2010/main" xmlns:p15="http://schemas.microsoft.com/office/powerpoint/2012/main" xmlns:ahyp="http://schemas.microsoft.com/office/drawing/2018/hyperlinkcolor">
-  <p:cSld>
-    <p:spTree>
-      <p:nvGrpSpPr>
-        <p:cNvPr id="348" name="Shape 348"/>
-        <p:cNvGrpSpPr/>
-        <p:nvPr/>
-      </p:nvGrpSpPr>
-      <p:grpSpPr>
-        <a:xfrm>
-          <a:off x="0" y="0"/>
-          <a:ext cx="0" cy="0"/>
-          <a:chOff x="0" y="0"/>
-          <a:chExt cx="0" cy="0"/>
-        </a:xfrm>
-      </p:grpSpPr>
-      <p:sp>
-        <p:nvSpPr>
-          <p:cNvPr id="349" name="Google Shape;349;p43"/>
-          <p:cNvSpPr txBox="1"/>
-          <p:nvPr>
-            <p:ph type="title"/>
-          </p:nvPr>
-        </p:nvSpPr>
-        <p:spPr>
-          <a:xfrm>
-            <a:off x="311700" y="445025"/>
-            <a:ext cx="8520600" cy="572700"/>
-          </a:xfrm>
-          <a:prstGeom prst="rect">
-            <a:avLst/>
-          </a:prstGeom>
-        </p:spPr>
-        <p:txBody>
-          <a:bodyPr anchorCtr="0" anchor="t" bIns="91425" lIns="91425" spcFirstLastPara="1" rIns="91425" wrap="square" tIns="91425">
-            <a:normAutofit fontScale="90000"/>
-          </a:bodyPr>
-          <a:lstStyle/>
-          <a:p>
-            <a:pPr indent="0" lvl="0" marL="0" rtl="0" algn="l">
-              <a:spcBef>
-                <a:spcPts val="0"/>
-              </a:spcBef>
-              <a:spcAft>
-                <a:spcPts val="0"/>
-              </a:spcAft>
-              <a:buNone/>
-            </a:pPr>
-            <a:r>
-              <a:rPr lang="en"/>
-              <a:t>Roles</a:t>
-            </a:r>
-            <a:endParaRPr/>
-          </a:p>
-        </p:txBody>
-      </p:sp>
-      <p:sp>
-        <p:nvSpPr>
-          <p:cNvPr id="350" name="Google Shape;350;p43"/>
-          <p:cNvSpPr txBox="1"/>
-          <p:nvPr>
-            <p:ph idx="1" type="body"/>
-          </p:nvPr>
-        </p:nvSpPr>
-        <p:spPr>
-          <a:xfrm>
-            <a:off x="311700" y="1152475"/>
-            <a:ext cx="8520600" cy="3416400"/>
-          </a:xfrm>
-          <a:prstGeom prst="rect">
-            <a:avLst/>
-          </a:prstGeom>
-        </p:spPr>
-        <p:txBody>
-          <a:bodyPr anchorCtr="0" anchor="t" bIns="91425" lIns="91425" spcFirstLastPara="1" rIns="91425" wrap="square" tIns="91425">
-            <a:normAutofit/>
-          </a:bodyPr>
-          <a:lstStyle/>
-          <a:p>
-            <a:pPr indent="-342900" lvl="0" marL="457200" rtl="0" algn="l">
-              <a:lnSpc>
-                <a:spcPct val="150000"/>
-              </a:lnSpc>
-              <a:spcBef>
-                <a:spcPts val="0"/>
-              </a:spcBef>
-              <a:spcAft>
-                <a:spcPts val="0"/>
-              </a:spcAft>
-              <a:buSzPts val="1800"/>
-              <a:buChar char="●"/>
-            </a:pPr>
-            <a:r>
-              <a:rPr lang="en"/>
-              <a:t>Caden</a:t>
-            </a:r>
-            <a:endParaRPr/>
-          </a:p>
-          <a:p>
-            <a:pPr indent="-317500" lvl="1" marL="914400" rtl="0" algn="l">
-              <a:lnSpc>
-                <a:spcPct val="150000"/>
-              </a:lnSpc>
-              <a:spcBef>
-                <a:spcPts val="0"/>
-              </a:spcBef>
-              <a:spcAft>
-                <a:spcPts val="0"/>
-              </a:spcAft>
-              <a:buSzPts val="1400"/>
-              <a:buChar char="○"/>
-            </a:pPr>
-            <a:r>
-              <a:rPr lang="en"/>
-              <a:t>Tester, Backend, Python BTC Worker API, Bitcoin Server node</a:t>
-            </a:r>
-            <a:endParaRPr/>
-          </a:p>
-          <a:p>
-            <a:pPr indent="-342900" lvl="0" marL="457200" rtl="0" algn="l">
-              <a:lnSpc>
-                <a:spcPct val="150000"/>
-              </a:lnSpc>
-              <a:spcBef>
-                <a:spcPts val="0"/>
-              </a:spcBef>
-              <a:spcAft>
-                <a:spcPts val="0"/>
-              </a:spcAft>
-              <a:buSzPts val="1800"/>
-              <a:buChar char="●"/>
-            </a:pPr>
-            <a:r>
-              <a:rPr lang="en"/>
-              <a:t>Derek</a:t>
-            </a:r>
-            <a:endParaRPr/>
-          </a:p>
-          <a:p>
-            <a:pPr indent="-317500" lvl="1" marL="914400" rtl="0" algn="l">
-              <a:lnSpc>
-                <a:spcPct val="150000"/>
-              </a:lnSpc>
-              <a:spcBef>
-                <a:spcPts val="0"/>
-              </a:spcBef>
-              <a:spcAft>
-                <a:spcPts val="0"/>
-              </a:spcAft>
-              <a:buSzPts val="1400"/>
-              <a:buChar char="○"/>
-            </a:pPr>
-            <a:r>
-              <a:rPr lang="en"/>
-              <a:t>Tester, Frontend, Backend, Web API</a:t>
-            </a:r>
-            <a:endParaRPr/>
-          </a:p>
-          <a:p>
-            <a:pPr indent="-342900" lvl="0" marL="457200" rtl="0" algn="l">
-              <a:lnSpc>
-                <a:spcPct val="150000"/>
-              </a:lnSpc>
-              <a:spcBef>
-                <a:spcPts val="0"/>
-              </a:spcBef>
-              <a:spcAft>
-                <a:spcPts val="0"/>
-              </a:spcAft>
-              <a:buSzPts val="1800"/>
-              <a:buChar char="●"/>
-            </a:pPr>
-            <a:r>
-              <a:rPr lang="en"/>
-              <a:t>Lars</a:t>
-            </a:r>
-            <a:endParaRPr/>
-          </a:p>
-          <a:p>
-            <a:pPr indent="-317500" lvl="1" marL="914400" rtl="0" algn="l">
-              <a:lnSpc>
-                <a:spcPct val="150000"/>
-              </a:lnSpc>
-              <a:spcBef>
-                <a:spcPts val="0"/>
-              </a:spcBef>
-              <a:spcAft>
-                <a:spcPts val="0"/>
-              </a:spcAft>
-              <a:buSzPts val="1400"/>
-              <a:buChar char="○"/>
-            </a:pPr>
-            <a:r>
-              <a:rPr lang="en"/>
-              <a:t>Tester, Frontend, Backend, Python BTC Worker Math</a:t>
-            </a:r>
-            <a:endParaRPr/>
-          </a:p>
-          <a:p>
-            <a:pPr indent="-342900" lvl="0" marL="457200" rtl="0" algn="l">
-              <a:lnSpc>
-                <a:spcPct val="150000"/>
-              </a:lnSpc>
-              <a:spcBef>
-                <a:spcPts val="0"/>
-              </a:spcBef>
-              <a:spcAft>
-                <a:spcPts val="0"/>
-              </a:spcAft>
-              <a:buSzPts val="1800"/>
-              <a:buChar char="●"/>
-            </a:pPr>
-            <a:r>
-              <a:rPr lang="en"/>
-              <a:t>Zong</a:t>
-            </a:r>
-            <a:endParaRPr/>
-          </a:p>
-          <a:p>
-            <a:pPr indent="-317500" lvl="1" marL="914400" rtl="0" algn="l">
-              <a:lnSpc>
-                <a:spcPct val="150000"/>
-              </a:lnSpc>
-              <a:spcBef>
-                <a:spcPts val="0"/>
-              </a:spcBef>
-              <a:spcAft>
-                <a:spcPts val="0"/>
-              </a:spcAft>
-              <a:buSzPts val="1400"/>
-              <a:buChar char="○"/>
-            </a:pPr>
-            <a:r>
-              <a:rPr lang="en"/>
-              <a:t>Tester, Frontend, Web Interface</a:t>
             </a:r>
             <a:endParaRPr/>
           </a:p>
